--- a/宣道詩/(宣道詩27)非我惟主.pptx
+++ b/宣道詩/(宣道詩27)非我惟主.pptx
@@ -5,16 +5,27 @@
     <p:sldMasterId id="2147483660" r:id="rId1"/>
   </p:sldMasterIdLst>
   <p:sldIdLst>
-    <p:sldId id="257" r:id="rId2"/>
-    <p:sldId id="258" r:id="rId3"/>
-    <p:sldId id="259" r:id="rId4"/>
-    <p:sldId id="260" r:id="rId5"/>
-    <p:sldId id="261" r:id="rId6"/>
-    <p:sldId id="262" r:id="rId7"/>
-    <p:sldId id="263" r:id="rId8"/>
-    <p:sldId id="265" r:id="rId9"/>
-    <p:sldId id="264" r:id="rId10"/>
-    <p:sldId id="266" r:id="rId11"/>
+    <p:sldId id="391" r:id="rId2"/>
+    <p:sldId id="412" r:id="rId3"/>
+    <p:sldId id="595" r:id="rId4"/>
+    <p:sldId id="596" r:id="rId5"/>
+    <p:sldId id="597" r:id="rId6"/>
+    <p:sldId id="598" r:id="rId7"/>
+    <p:sldId id="599" r:id="rId8"/>
+    <p:sldId id="600" r:id="rId9"/>
+    <p:sldId id="601" r:id="rId10"/>
+    <p:sldId id="602" r:id="rId11"/>
+    <p:sldId id="603" r:id="rId12"/>
+    <p:sldId id="604" r:id="rId13"/>
+    <p:sldId id="605" r:id="rId14"/>
+    <p:sldId id="606" r:id="rId15"/>
+    <p:sldId id="607" r:id="rId16"/>
+    <p:sldId id="608" r:id="rId17"/>
+    <p:sldId id="609" r:id="rId18"/>
+    <p:sldId id="610" r:id="rId19"/>
+    <p:sldId id="611" r:id="rId20"/>
+    <p:sldId id="612" r:id="rId21"/>
+    <p:sldId id="613" r:id="rId22"/>
   </p:sldIdLst>
   <p:sldSz cx="12192000" cy="6858000"/>
   <p:notesSz cx="6858000" cy="9144000"/>
@@ -159,7 +170,7 @@
           <a:lstStyle/>
           <a:p>
             <a:r>
-              <a:rPr lang="en-US" altLang="zh-TW" smtClean="0"/>
+              <a:rPr lang="en-US" altLang="zh-TW"/>
               <a:t>Click to edit Master title style</a:t>
             </a:r>
             <a:endParaRPr lang="zh-TW" altLang="en-US"/>
@@ -278,7 +289,7 @@
           </a:lstStyle>
           <a:p>
             <a:r>
-              <a:rPr lang="en-US" altLang="zh-TW" smtClean="0"/>
+              <a:rPr lang="en-US" altLang="zh-TW"/>
               <a:t>Click to edit Master subtitle style</a:t>
             </a:r>
             <a:endParaRPr lang="zh-TW" altLang="en-US"/>
@@ -302,7 +313,7 @@
           <a:p>
             <a:fld id="{FB2F902F-989C-42A4-990C-763F717649B2}" type="datetimeFigureOut">
               <a:rPr lang="vi-VN" smtClean="0"/>
-              <a:t>02/09/2020</a:t>
+              <a:t>02/08/2024</a:t>
             </a:fld>
             <a:endParaRPr lang="vi-VN"/>
           </a:p>
@@ -396,7 +407,7 @@
           <a:lstStyle/>
           <a:p>
             <a:r>
-              <a:rPr lang="en-US" altLang="zh-TW" smtClean="0"/>
+              <a:rPr lang="en-US" altLang="zh-TW"/>
               <a:t>Click to edit Master title style</a:t>
             </a:r>
             <a:endParaRPr lang="zh-TW" altLang="en-US"/>
@@ -420,35 +431,35 @@
           <a:p>
             <a:pPr lvl="0"/>
             <a:r>
-              <a:rPr lang="en-US" altLang="zh-TW" smtClean="0"/>
+              <a:rPr lang="en-US" altLang="zh-TW"/>
               <a:t>Edit Master text styles</a:t>
             </a:r>
           </a:p>
           <a:p>
             <a:pPr lvl="1"/>
             <a:r>
-              <a:rPr lang="en-US" altLang="zh-TW" smtClean="0"/>
+              <a:rPr lang="en-US" altLang="zh-TW"/>
               <a:t>Second level</a:t>
             </a:r>
           </a:p>
           <a:p>
             <a:pPr lvl="2"/>
             <a:r>
-              <a:rPr lang="en-US" altLang="zh-TW" smtClean="0"/>
+              <a:rPr lang="en-US" altLang="zh-TW"/>
               <a:t>Third level</a:t>
             </a:r>
           </a:p>
           <a:p>
             <a:pPr lvl="3"/>
             <a:r>
-              <a:rPr lang="en-US" altLang="zh-TW" smtClean="0"/>
+              <a:rPr lang="en-US" altLang="zh-TW"/>
               <a:t>Fourth level</a:t>
             </a:r>
           </a:p>
           <a:p>
             <a:pPr lvl="4"/>
             <a:r>
-              <a:rPr lang="en-US" altLang="zh-TW" smtClean="0"/>
+              <a:rPr lang="en-US" altLang="zh-TW"/>
               <a:t>Fifth level</a:t>
             </a:r>
             <a:endParaRPr lang="zh-TW" altLang="en-US"/>
@@ -472,7 +483,7 @@
           <a:p>
             <a:fld id="{FB2F902F-989C-42A4-990C-763F717649B2}" type="datetimeFigureOut">
               <a:rPr lang="vi-VN" smtClean="0"/>
-              <a:t>02/09/2020</a:t>
+              <a:t>02/08/2024</a:t>
             </a:fld>
             <a:endParaRPr lang="vi-VN"/>
           </a:p>
@@ -571,7 +582,7 @@
           <a:lstStyle/>
           <a:p>
             <a:r>
-              <a:rPr lang="en-US" altLang="zh-TW" smtClean="0"/>
+              <a:rPr lang="en-US" altLang="zh-TW"/>
               <a:t>Click to edit Master title style</a:t>
             </a:r>
             <a:endParaRPr lang="zh-TW" altLang="en-US"/>
@@ -600,35 +611,35 @@
           <a:p>
             <a:pPr lvl="0"/>
             <a:r>
-              <a:rPr lang="en-US" altLang="zh-TW" smtClean="0"/>
+              <a:rPr lang="en-US" altLang="zh-TW"/>
               <a:t>Edit Master text styles</a:t>
             </a:r>
           </a:p>
           <a:p>
             <a:pPr lvl="1"/>
             <a:r>
-              <a:rPr lang="en-US" altLang="zh-TW" smtClean="0"/>
+              <a:rPr lang="en-US" altLang="zh-TW"/>
               <a:t>Second level</a:t>
             </a:r>
           </a:p>
           <a:p>
             <a:pPr lvl="2"/>
             <a:r>
-              <a:rPr lang="en-US" altLang="zh-TW" smtClean="0"/>
+              <a:rPr lang="en-US" altLang="zh-TW"/>
               <a:t>Third level</a:t>
             </a:r>
           </a:p>
           <a:p>
             <a:pPr lvl="3"/>
             <a:r>
-              <a:rPr lang="en-US" altLang="zh-TW" smtClean="0"/>
+              <a:rPr lang="en-US" altLang="zh-TW"/>
               <a:t>Fourth level</a:t>
             </a:r>
           </a:p>
           <a:p>
             <a:pPr lvl="4"/>
             <a:r>
-              <a:rPr lang="en-US" altLang="zh-TW" smtClean="0"/>
+              <a:rPr lang="en-US" altLang="zh-TW"/>
               <a:t>Fifth level</a:t>
             </a:r>
             <a:endParaRPr lang="zh-TW" altLang="en-US"/>
@@ -652,7 +663,7 @@
           <a:p>
             <a:fld id="{FB2F902F-989C-42A4-990C-763F717649B2}" type="datetimeFigureOut">
               <a:rPr lang="vi-VN" smtClean="0"/>
-              <a:t>02/09/2020</a:t>
+              <a:t>02/08/2024</a:t>
             </a:fld>
             <a:endParaRPr lang="vi-VN"/>
           </a:p>
@@ -746,7 +757,7 @@
           <a:lstStyle/>
           <a:p>
             <a:r>
-              <a:rPr lang="en-US" altLang="zh-TW" smtClean="0"/>
+              <a:rPr lang="en-US" altLang="zh-TW"/>
               <a:t>Click to edit Master title style</a:t>
             </a:r>
             <a:endParaRPr lang="zh-TW" altLang="en-US"/>
@@ -770,35 +781,35 @@
           <a:p>
             <a:pPr lvl="0"/>
             <a:r>
-              <a:rPr lang="en-US" altLang="zh-TW" smtClean="0"/>
+              <a:rPr lang="en-US" altLang="zh-TW"/>
               <a:t>Edit Master text styles</a:t>
             </a:r>
           </a:p>
           <a:p>
             <a:pPr lvl="1"/>
             <a:r>
-              <a:rPr lang="en-US" altLang="zh-TW" smtClean="0"/>
+              <a:rPr lang="en-US" altLang="zh-TW"/>
               <a:t>Second level</a:t>
             </a:r>
           </a:p>
           <a:p>
             <a:pPr lvl="2"/>
             <a:r>
-              <a:rPr lang="en-US" altLang="zh-TW" smtClean="0"/>
+              <a:rPr lang="en-US" altLang="zh-TW"/>
               <a:t>Third level</a:t>
             </a:r>
           </a:p>
           <a:p>
             <a:pPr lvl="3"/>
             <a:r>
-              <a:rPr lang="en-US" altLang="zh-TW" smtClean="0"/>
+              <a:rPr lang="en-US" altLang="zh-TW"/>
               <a:t>Fourth level</a:t>
             </a:r>
           </a:p>
           <a:p>
             <a:pPr lvl="4"/>
             <a:r>
-              <a:rPr lang="en-US" altLang="zh-TW" smtClean="0"/>
+              <a:rPr lang="en-US" altLang="zh-TW"/>
               <a:t>Fifth level</a:t>
             </a:r>
             <a:endParaRPr lang="zh-TW" altLang="en-US"/>
@@ -822,7 +833,7 @@
           <a:p>
             <a:fld id="{FB2F902F-989C-42A4-990C-763F717649B2}" type="datetimeFigureOut">
               <a:rPr lang="vi-VN" smtClean="0"/>
-              <a:t>02/09/2020</a:t>
+              <a:t>02/08/2024</a:t>
             </a:fld>
             <a:endParaRPr lang="vi-VN"/>
           </a:p>
@@ -925,7 +936,7 @@
           </a:lstStyle>
           <a:p>
             <a:r>
-              <a:rPr lang="en-US" altLang="zh-TW" smtClean="0"/>
+              <a:rPr lang="en-US" altLang="zh-TW"/>
               <a:t>Click to edit Master title style</a:t>
             </a:r>
             <a:endParaRPr lang="zh-TW" altLang="en-US"/>
@@ -1045,7 +1056,7 @@
           <a:p>
             <a:pPr lvl="0"/>
             <a:r>
-              <a:rPr lang="en-US" altLang="zh-TW" smtClean="0"/>
+              <a:rPr lang="en-US" altLang="zh-TW"/>
               <a:t>Edit Master text styles</a:t>
             </a:r>
           </a:p>
@@ -1068,7 +1079,7 @@
           <a:p>
             <a:fld id="{FB2F902F-989C-42A4-990C-763F717649B2}" type="datetimeFigureOut">
               <a:rPr lang="vi-VN" smtClean="0"/>
-              <a:t>02/09/2020</a:t>
+              <a:t>02/08/2024</a:t>
             </a:fld>
             <a:endParaRPr lang="vi-VN"/>
           </a:p>
@@ -1162,7 +1173,7 @@
           <a:lstStyle/>
           <a:p>
             <a:r>
-              <a:rPr lang="en-US" altLang="zh-TW" smtClean="0"/>
+              <a:rPr lang="en-US" altLang="zh-TW"/>
               <a:t>Click to edit Master title style</a:t>
             </a:r>
             <a:endParaRPr lang="zh-TW" altLang="en-US"/>
@@ -1219,35 +1230,35 @@
           <a:p>
             <a:pPr lvl="0"/>
             <a:r>
-              <a:rPr lang="en-US" altLang="zh-TW" smtClean="0"/>
+              <a:rPr lang="en-US" altLang="zh-TW"/>
               <a:t>Edit Master text styles</a:t>
             </a:r>
           </a:p>
           <a:p>
             <a:pPr lvl="1"/>
             <a:r>
-              <a:rPr lang="en-US" altLang="zh-TW" smtClean="0"/>
+              <a:rPr lang="en-US" altLang="zh-TW"/>
               <a:t>Second level</a:t>
             </a:r>
           </a:p>
           <a:p>
             <a:pPr lvl="2"/>
             <a:r>
-              <a:rPr lang="en-US" altLang="zh-TW" smtClean="0"/>
+              <a:rPr lang="en-US" altLang="zh-TW"/>
               <a:t>Third level</a:t>
             </a:r>
           </a:p>
           <a:p>
             <a:pPr lvl="3"/>
             <a:r>
-              <a:rPr lang="en-US" altLang="zh-TW" smtClean="0"/>
+              <a:rPr lang="en-US" altLang="zh-TW"/>
               <a:t>Fourth level</a:t>
             </a:r>
           </a:p>
           <a:p>
             <a:pPr lvl="4"/>
             <a:r>
-              <a:rPr lang="en-US" altLang="zh-TW" smtClean="0"/>
+              <a:rPr lang="en-US" altLang="zh-TW"/>
               <a:t>Fifth level</a:t>
             </a:r>
             <a:endParaRPr lang="zh-TW" altLang="en-US"/>
@@ -1304,35 +1315,35 @@
           <a:p>
             <a:pPr lvl="0"/>
             <a:r>
-              <a:rPr lang="en-US" altLang="zh-TW" smtClean="0"/>
+              <a:rPr lang="en-US" altLang="zh-TW"/>
               <a:t>Edit Master text styles</a:t>
             </a:r>
           </a:p>
           <a:p>
             <a:pPr lvl="1"/>
             <a:r>
-              <a:rPr lang="en-US" altLang="zh-TW" smtClean="0"/>
+              <a:rPr lang="en-US" altLang="zh-TW"/>
               <a:t>Second level</a:t>
             </a:r>
           </a:p>
           <a:p>
             <a:pPr lvl="2"/>
             <a:r>
-              <a:rPr lang="en-US" altLang="zh-TW" smtClean="0"/>
+              <a:rPr lang="en-US" altLang="zh-TW"/>
               <a:t>Third level</a:t>
             </a:r>
           </a:p>
           <a:p>
             <a:pPr lvl="3"/>
             <a:r>
-              <a:rPr lang="en-US" altLang="zh-TW" smtClean="0"/>
+              <a:rPr lang="en-US" altLang="zh-TW"/>
               <a:t>Fourth level</a:t>
             </a:r>
           </a:p>
           <a:p>
             <a:pPr lvl="4"/>
             <a:r>
-              <a:rPr lang="en-US" altLang="zh-TW" smtClean="0"/>
+              <a:rPr lang="en-US" altLang="zh-TW"/>
               <a:t>Fifth level</a:t>
             </a:r>
             <a:endParaRPr lang="zh-TW" altLang="en-US"/>
@@ -1356,7 +1367,7 @@
           <a:p>
             <a:fld id="{FB2F902F-989C-42A4-990C-763F717649B2}" type="datetimeFigureOut">
               <a:rPr lang="vi-VN" smtClean="0"/>
-              <a:t>02/09/2020</a:t>
+              <a:t>02/08/2024</a:t>
             </a:fld>
             <a:endParaRPr lang="vi-VN"/>
           </a:p>
@@ -1454,7 +1465,7 @@
           </a:lstStyle>
           <a:p>
             <a:r>
-              <a:rPr lang="en-US" altLang="zh-TW" smtClean="0"/>
+              <a:rPr lang="en-US" altLang="zh-TW"/>
               <a:t>Click to edit Master title style</a:t>
             </a:r>
             <a:endParaRPr lang="zh-TW" altLang="en-US"/>
@@ -1520,7 +1531,7 @@
           <a:p>
             <a:pPr lvl="0"/>
             <a:r>
-              <a:rPr lang="en-US" altLang="zh-TW" smtClean="0"/>
+              <a:rPr lang="en-US" altLang="zh-TW"/>
               <a:t>Edit Master text styles</a:t>
             </a:r>
           </a:p>
@@ -1576,35 +1587,35 @@
           <a:p>
             <a:pPr lvl="0"/>
             <a:r>
-              <a:rPr lang="en-US" altLang="zh-TW" smtClean="0"/>
+              <a:rPr lang="en-US" altLang="zh-TW"/>
               <a:t>Edit Master text styles</a:t>
             </a:r>
           </a:p>
           <a:p>
             <a:pPr lvl="1"/>
             <a:r>
-              <a:rPr lang="en-US" altLang="zh-TW" smtClean="0"/>
+              <a:rPr lang="en-US" altLang="zh-TW"/>
               <a:t>Second level</a:t>
             </a:r>
           </a:p>
           <a:p>
             <a:pPr lvl="2"/>
             <a:r>
-              <a:rPr lang="en-US" altLang="zh-TW" smtClean="0"/>
+              <a:rPr lang="en-US" altLang="zh-TW"/>
               <a:t>Third level</a:t>
             </a:r>
           </a:p>
           <a:p>
             <a:pPr lvl="3"/>
             <a:r>
-              <a:rPr lang="en-US" altLang="zh-TW" smtClean="0"/>
+              <a:rPr lang="en-US" altLang="zh-TW"/>
               <a:t>Fourth level</a:t>
             </a:r>
           </a:p>
           <a:p>
             <a:pPr lvl="4"/>
             <a:r>
-              <a:rPr lang="en-US" altLang="zh-TW" smtClean="0"/>
+              <a:rPr lang="en-US" altLang="zh-TW"/>
               <a:t>Fifth level</a:t>
             </a:r>
             <a:endParaRPr lang="zh-TW" altLang="en-US"/>
@@ -1670,7 +1681,7 @@
           <a:p>
             <a:pPr lvl="0"/>
             <a:r>
-              <a:rPr lang="en-US" altLang="zh-TW" smtClean="0"/>
+              <a:rPr lang="en-US" altLang="zh-TW"/>
               <a:t>Edit Master text styles</a:t>
             </a:r>
           </a:p>
@@ -1726,35 +1737,35 @@
           <a:p>
             <a:pPr lvl="0"/>
             <a:r>
-              <a:rPr lang="en-US" altLang="zh-TW" smtClean="0"/>
+              <a:rPr lang="en-US" altLang="zh-TW"/>
               <a:t>Edit Master text styles</a:t>
             </a:r>
           </a:p>
           <a:p>
             <a:pPr lvl="1"/>
             <a:r>
-              <a:rPr lang="en-US" altLang="zh-TW" smtClean="0"/>
+              <a:rPr lang="en-US" altLang="zh-TW"/>
               <a:t>Second level</a:t>
             </a:r>
           </a:p>
           <a:p>
             <a:pPr lvl="2"/>
             <a:r>
-              <a:rPr lang="en-US" altLang="zh-TW" smtClean="0"/>
+              <a:rPr lang="en-US" altLang="zh-TW"/>
               <a:t>Third level</a:t>
             </a:r>
           </a:p>
           <a:p>
             <a:pPr lvl="3"/>
             <a:r>
-              <a:rPr lang="en-US" altLang="zh-TW" smtClean="0"/>
+              <a:rPr lang="en-US" altLang="zh-TW"/>
               <a:t>Fourth level</a:t>
             </a:r>
           </a:p>
           <a:p>
             <a:pPr lvl="4"/>
             <a:r>
-              <a:rPr lang="en-US" altLang="zh-TW" smtClean="0"/>
+              <a:rPr lang="en-US" altLang="zh-TW"/>
               <a:t>Fifth level</a:t>
             </a:r>
             <a:endParaRPr lang="zh-TW" altLang="en-US"/>
@@ -1778,7 +1789,7 @@
           <a:p>
             <a:fld id="{FB2F902F-989C-42A4-990C-763F717649B2}" type="datetimeFigureOut">
               <a:rPr lang="vi-VN" smtClean="0"/>
-              <a:t>02/09/2020</a:t>
+              <a:t>02/08/2024</a:t>
             </a:fld>
             <a:endParaRPr lang="vi-VN"/>
           </a:p>
@@ -1872,7 +1883,7 @@
           <a:lstStyle/>
           <a:p>
             <a:r>
-              <a:rPr lang="en-US" altLang="zh-TW" smtClean="0"/>
+              <a:rPr lang="en-US" altLang="zh-TW"/>
               <a:t>Click to edit Master title style</a:t>
             </a:r>
             <a:endParaRPr lang="zh-TW" altLang="en-US"/>
@@ -1896,7 +1907,7 @@
           <a:p>
             <a:fld id="{FB2F902F-989C-42A4-990C-763F717649B2}" type="datetimeFigureOut">
               <a:rPr lang="vi-VN" smtClean="0"/>
-              <a:t>02/09/2020</a:t>
+              <a:t>02/08/2024</a:t>
             </a:fld>
             <a:endParaRPr lang="vi-VN"/>
           </a:p>
@@ -1991,7 +2002,7 @@
           <a:p>
             <a:fld id="{FB2F902F-989C-42A4-990C-763F717649B2}" type="datetimeFigureOut">
               <a:rPr lang="vi-VN" smtClean="0"/>
-              <a:t>02/09/2020</a:t>
+              <a:t>02/08/2024</a:t>
             </a:fld>
             <a:endParaRPr lang="vi-VN"/>
           </a:p>
@@ -2094,7 +2105,7 @@
           </a:lstStyle>
           <a:p>
             <a:r>
-              <a:rPr lang="en-US" altLang="zh-TW" smtClean="0"/>
+              <a:rPr lang="en-US" altLang="zh-TW"/>
               <a:t>Click to edit Master title style</a:t>
             </a:r>
             <a:endParaRPr lang="zh-TW" altLang="en-US"/>
@@ -2151,35 +2162,35 @@
           <a:p>
             <a:pPr lvl="0"/>
             <a:r>
-              <a:rPr lang="en-US" altLang="zh-TW" smtClean="0"/>
+              <a:rPr lang="en-US" altLang="zh-TW"/>
               <a:t>Edit Master text styles</a:t>
             </a:r>
           </a:p>
           <a:p>
             <a:pPr lvl="1"/>
             <a:r>
-              <a:rPr lang="en-US" altLang="zh-TW" smtClean="0"/>
+              <a:rPr lang="en-US" altLang="zh-TW"/>
               <a:t>Second level</a:t>
             </a:r>
           </a:p>
           <a:p>
             <a:pPr lvl="2"/>
             <a:r>
-              <a:rPr lang="en-US" altLang="zh-TW" smtClean="0"/>
+              <a:rPr lang="en-US" altLang="zh-TW"/>
               <a:t>Third level</a:t>
             </a:r>
           </a:p>
           <a:p>
             <a:pPr lvl="3"/>
             <a:r>
-              <a:rPr lang="en-US" altLang="zh-TW" smtClean="0"/>
+              <a:rPr lang="en-US" altLang="zh-TW"/>
               <a:t>Fourth level</a:t>
             </a:r>
           </a:p>
           <a:p>
             <a:pPr lvl="4"/>
             <a:r>
-              <a:rPr lang="en-US" altLang="zh-TW" smtClean="0"/>
+              <a:rPr lang="en-US" altLang="zh-TW"/>
               <a:t>Fifth level</a:t>
             </a:r>
             <a:endParaRPr lang="zh-TW" altLang="en-US"/>
@@ -2245,7 +2256,7 @@
           <a:p>
             <a:pPr lvl="0"/>
             <a:r>
-              <a:rPr lang="en-US" altLang="zh-TW" smtClean="0"/>
+              <a:rPr lang="en-US" altLang="zh-TW"/>
               <a:t>Edit Master text styles</a:t>
             </a:r>
           </a:p>
@@ -2268,7 +2279,7 @@
           <a:p>
             <a:fld id="{FB2F902F-989C-42A4-990C-763F717649B2}" type="datetimeFigureOut">
               <a:rPr lang="vi-VN" smtClean="0"/>
-              <a:t>02/09/2020</a:t>
+              <a:t>02/08/2024</a:t>
             </a:fld>
             <a:endParaRPr lang="vi-VN"/>
           </a:p>
@@ -2371,7 +2382,7 @@
           </a:lstStyle>
           <a:p>
             <a:r>
-              <a:rPr lang="en-US" altLang="zh-TW" smtClean="0"/>
+              <a:rPr lang="en-US" altLang="zh-TW"/>
               <a:t>Click to edit Master title style</a:t>
             </a:r>
             <a:endParaRPr lang="zh-TW" altLang="en-US"/>
@@ -2436,7 +2447,7 @@
           </a:lstStyle>
           <a:p>
             <a:r>
-              <a:rPr lang="en-US" altLang="zh-TW" smtClean="0"/>
+              <a:rPr lang="en-US" altLang="zh-TW"/>
               <a:t>Click icon to add picture</a:t>
             </a:r>
             <a:endParaRPr lang="zh-TW" altLang="en-US"/>
@@ -2502,7 +2513,7 @@
           <a:p>
             <a:pPr lvl="0"/>
             <a:r>
-              <a:rPr lang="en-US" altLang="zh-TW" smtClean="0"/>
+              <a:rPr lang="en-US" altLang="zh-TW"/>
               <a:t>Edit Master text styles</a:t>
             </a:r>
           </a:p>
@@ -2525,7 +2536,7 @@
           <a:p>
             <a:fld id="{FB2F902F-989C-42A4-990C-763F717649B2}" type="datetimeFigureOut">
               <a:rPr lang="vi-VN" smtClean="0"/>
-              <a:t>02/09/2020</a:t>
+              <a:t>02/08/2024</a:t>
             </a:fld>
             <a:endParaRPr lang="vi-VN"/>
           </a:p>
@@ -2639,10 +2650,9 @@
           <a:lstStyle/>
           <a:p>
             <a:r>
-              <a:rPr lang="zh-TW" altLang="en-US" smtClean="0"/>
+              <a:rPr lang="zh-TW" altLang="en-US"/>
               <a:t>按一下以編輯母片標題樣式</a:t>
             </a:r>
-            <a:endParaRPr lang="zh-TW" altLang="en-US"/>
           </a:p>
         </p:txBody>
       </p:sp>
@@ -2673,38 +2683,37 @@
           <a:p>
             <a:pPr lvl="0"/>
             <a:r>
-              <a:rPr lang="zh-TW" altLang="en-US" smtClean="0"/>
+              <a:rPr lang="zh-TW" altLang="en-US"/>
               <a:t>按一下以編輯母片文字樣式</a:t>
             </a:r>
           </a:p>
           <a:p>
             <a:pPr lvl="1"/>
             <a:r>
-              <a:rPr lang="zh-TW" altLang="en-US" smtClean="0"/>
+              <a:rPr lang="zh-TW" altLang="en-US"/>
               <a:t>第二層</a:t>
             </a:r>
           </a:p>
           <a:p>
             <a:pPr lvl="2"/>
             <a:r>
-              <a:rPr lang="zh-TW" altLang="en-US" smtClean="0"/>
+              <a:rPr lang="zh-TW" altLang="en-US"/>
               <a:t>第三層</a:t>
             </a:r>
           </a:p>
           <a:p>
             <a:pPr lvl="3"/>
             <a:r>
-              <a:rPr lang="zh-TW" altLang="en-US" smtClean="0"/>
+              <a:rPr lang="zh-TW" altLang="en-US"/>
               <a:t>第四層</a:t>
             </a:r>
           </a:p>
           <a:p>
             <a:pPr lvl="4"/>
             <a:r>
-              <a:rPr lang="zh-TW" altLang="en-US" smtClean="0"/>
+              <a:rPr lang="zh-TW" altLang="en-US"/>
               <a:t>第五層</a:t>
             </a:r>
-            <a:endParaRPr lang="zh-TW" altLang="en-US"/>
           </a:p>
         </p:txBody>
       </p:sp>
@@ -2743,7 +2752,7 @@
           <a:p>
             <a:fld id="{FB2F902F-989C-42A4-990C-763F717649B2}" type="datetimeFigureOut">
               <a:rPr lang="vi-VN" smtClean="0"/>
-              <a:t>02/09/2020</a:t>
+              <a:t>02/08/2024</a:t>
             </a:fld>
             <a:endParaRPr lang="vi-VN"/>
           </a:p>
@@ -3120,7 +3129,7 @@
       </p:grpSpPr>
       <p:sp>
         <p:nvSpPr>
-          <p:cNvPr id="2" name="Title 1"/>
+          <p:cNvPr id="4" name="標題 3"/>
           <p:cNvSpPr>
             <a:spLocks noGrp="1"/>
           </p:cNvSpPr>
@@ -3128,211 +3137,98 @@
             <p:ph type="title"/>
           </p:nvPr>
         </p:nvSpPr>
-        <p:spPr/>
+        <p:spPr>
+          <a:xfrm>
+            <a:off x="0" y="2660915"/>
+            <a:ext cx="12192000" cy="1143000"/>
+          </a:xfrm>
+        </p:spPr>
         <p:txBody>
           <a:bodyPr>
-            <a:normAutofit/>
+            <a:noAutofit/>
           </a:bodyPr>
           <a:lstStyle/>
           <a:p>
             <a:r>
-              <a:rPr lang="zh-CN" altLang="en-US" sz="4800" b="1" dirty="0" smtClean="0">
-                <a:solidFill>
-                  <a:srgbClr val="002060"/>
-                </a:solidFill>
-                <a:latin typeface="Microsoft JhengHei" panose="020B0604030504040204" pitchFamily="34" charset="-120"/>
-                <a:ea typeface="Microsoft JhengHei" panose="020B0604030504040204" pitchFamily="34" charset="-120"/>
+              <a:rPr lang="zh-CN" altLang="en-US" sz="5333" b="1" u="sng" dirty="0">
+                <a:solidFill>
+                  <a:srgbClr val="660033"/>
+                </a:solidFill>
+                <a:effectLst>
+                  <a:outerShdw blurRad="38100" dist="38100" dir="2700000" algn="tl">
+                    <a:srgbClr val="000000">
+                      <a:alpha val="43137"/>
+                    </a:srgbClr>
+                  </a:outerShdw>
+                </a:effectLst>
+                <a:latin typeface="微軟正黑體" pitchFamily="34" charset="-120"/>
+                <a:ea typeface="微軟正黑體" pitchFamily="34" charset="-120"/>
+              </a:rPr>
+              <a:t>宣道詩 </a:t>
+            </a:r>
+            <a:r>
+              <a:rPr lang="en-US" altLang="zh-CN" sz="5333" b="1" u="sng" dirty="0">
+                <a:solidFill>
+                  <a:srgbClr val="660033"/>
+                </a:solidFill>
+                <a:effectLst>
+                  <a:outerShdw blurRad="38100" dist="38100" dir="2700000" algn="tl">
+                    <a:srgbClr val="000000">
+                      <a:alpha val="43137"/>
+                    </a:srgbClr>
+                  </a:outerShdw>
+                </a:effectLst>
+                <a:latin typeface="微軟正黑體" pitchFamily="34" charset="-120"/>
+                <a:ea typeface="微軟正黑體" pitchFamily="34" charset="-120"/>
+              </a:rPr>
+              <a:t>27</a:t>
+            </a:r>
+            <a:br>
+              <a:rPr lang="en-US" altLang="zh-CN" sz="7200" b="1" i="1" dirty="0">
+                <a:solidFill>
+                  <a:srgbClr val="660033"/>
+                </a:solidFill>
+                <a:effectLst>
+                  <a:outerShdw blurRad="38100" dist="38100" dir="2700000" algn="tl">
+                    <a:srgbClr val="000000">
+                      <a:alpha val="43137"/>
+                    </a:srgbClr>
+                  </a:outerShdw>
+                </a:effectLst>
+                <a:latin typeface="微軟正黑體" pitchFamily="34" charset="-120"/>
+                <a:ea typeface="微軟正黑體" pitchFamily="34" charset="-120"/>
+              </a:rPr>
+            </a:br>
+            <a:r>
+              <a:rPr lang="zh-CN" altLang="en-US" sz="8000" b="1" dirty="0">
+                <a:solidFill>
+                  <a:srgbClr val="000066"/>
+                </a:solidFill>
+                <a:effectLst>
+                  <a:outerShdw blurRad="38100" dist="38100" dir="2700000" algn="tl">
+                    <a:srgbClr val="000000">
+                      <a:alpha val="43137"/>
+                    </a:srgbClr>
+                  </a:outerShdw>
+                </a:effectLst>
+                <a:latin typeface="微軟正黑體" pitchFamily="34" charset="-120"/>
+                <a:ea typeface="微軟正黑體" pitchFamily="34" charset="-120"/>
               </a:rPr>
               <a:t>非我惟主</a:t>
             </a:r>
-            <a:endParaRPr lang="vi-VN" sz="4800" b="1" dirty="0">
+            <a:endParaRPr lang="zh-TW" altLang="en-US" sz="8000" b="1" dirty="0">
               <a:solidFill>
-                <a:srgbClr val="002060"/>
+                <a:srgbClr val="000066"/>
               </a:solidFill>
-              <a:ea typeface="Microsoft JhengHei" panose="020B0604030504040204" pitchFamily="34" charset="-120"/>
-            </a:endParaRPr>
-          </a:p>
-        </p:txBody>
-      </p:sp>
-      <p:sp>
-        <p:nvSpPr>
-          <p:cNvPr id="3" name="Content Placeholder 2"/>
-          <p:cNvSpPr>
-            <a:spLocks noGrp="1"/>
-          </p:cNvSpPr>
-          <p:nvPr>
-            <p:ph idx="1"/>
-          </p:nvPr>
-        </p:nvSpPr>
-        <p:spPr/>
-        <p:txBody>
-          <a:bodyPr>
-            <a:normAutofit/>
-          </a:bodyPr>
-          <a:lstStyle/>
-          <a:p>
-            <a:pPr marL="0" indent="0" algn="ctr">
-              <a:buNone/>
-            </a:pPr>
-            <a:r>
-              <a:rPr lang="zh-CN" altLang="en-US" sz="5400" b="1" dirty="0">
-                <a:solidFill>
-                  <a:srgbClr val="002060"/>
-                </a:solidFill>
-                <a:latin typeface="Microsoft JhengHei" panose="020B0604030504040204" pitchFamily="34" charset="-120"/>
-                <a:ea typeface="Microsoft JhengHei" panose="020B0604030504040204" pitchFamily="34" charset="-120"/>
-              </a:rPr>
-              <a:t>非我惟</a:t>
-            </a:r>
-            <a:r>
-              <a:rPr lang="zh-CN" altLang="en-US" sz="5400" b="1" dirty="0" smtClean="0">
-                <a:solidFill>
-                  <a:srgbClr val="002060"/>
-                </a:solidFill>
-                <a:latin typeface="Microsoft JhengHei" panose="020B0604030504040204" pitchFamily="34" charset="-120"/>
-                <a:ea typeface="Microsoft JhengHei" panose="020B0604030504040204" pitchFamily="34" charset="-120"/>
-              </a:rPr>
-              <a:t>主  被人高舉並愛敬</a:t>
-            </a:r>
-            <a:endParaRPr lang="en-US" altLang="zh-CN" sz="5400" b="1" dirty="0" smtClean="0">
-              <a:solidFill>
-                <a:srgbClr val="002060"/>
-              </a:solidFill>
-              <a:latin typeface="Microsoft JhengHei" panose="020B0604030504040204" pitchFamily="34" charset="-120"/>
-              <a:ea typeface="Microsoft JhengHei" panose="020B0604030504040204" pitchFamily="34" charset="-120"/>
-            </a:endParaRPr>
-          </a:p>
-          <a:p>
-            <a:pPr marL="0" indent="0" algn="ctr">
-              <a:buNone/>
-            </a:pPr>
-            <a:r>
-              <a:rPr lang="zh-CN" altLang="en-US" sz="5400" b="1" dirty="0">
-                <a:solidFill>
-                  <a:srgbClr val="002060"/>
-                </a:solidFill>
-                <a:latin typeface="Microsoft JhengHei" panose="020B0604030504040204" pitchFamily="34" charset="-120"/>
-                <a:ea typeface="Microsoft JhengHei" panose="020B0604030504040204" pitchFamily="34" charset="-120"/>
-              </a:rPr>
-              <a:t>非我惟</a:t>
-            </a:r>
-            <a:r>
-              <a:rPr lang="zh-CN" altLang="en-US" sz="5400" b="1" dirty="0" smtClean="0">
-                <a:solidFill>
-                  <a:srgbClr val="002060"/>
-                </a:solidFill>
-                <a:latin typeface="Microsoft JhengHei" panose="020B0604030504040204" pitchFamily="34" charset="-120"/>
-                <a:ea typeface="Microsoft JhengHei" panose="020B0604030504040204" pitchFamily="34" charset="-120"/>
-              </a:rPr>
-              <a:t>主  被人傳揚相信</a:t>
-            </a:r>
-            <a:endParaRPr lang="en-US" altLang="zh-CN" sz="5400" b="1" dirty="0" smtClean="0">
-              <a:solidFill>
-                <a:srgbClr val="002060"/>
-              </a:solidFill>
-              <a:latin typeface="Microsoft JhengHei" panose="020B0604030504040204" pitchFamily="34" charset="-120"/>
-              <a:ea typeface="Microsoft JhengHei" panose="020B0604030504040204" pitchFamily="34" charset="-120"/>
-            </a:endParaRPr>
-          </a:p>
-          <a:p>
-            <a:pPr marL="0" indent="0" algn="ctr">
-              <a:buNone/>
-            </a:pPr>
-            <a:r>
-              <a:rPr lang="zh-CN" altLang="en-US" sz="5400" b="1" dirty="0">
-                <a:solidFill>
-                  <a:srgbClr val="002060"/>
-                </a:solidFill>
-                <a:latin typeface="Microsoft JhengHei" panose="020B0604030504040204" pitchFamily="34" charset="-120"/>
-                <a:ea typeface="Microsoft JhengHei" panose="020B0604030504040204" pitchFamily="34" charset="-120"/>
-              </a:rPr>
-              <a:t>非我惟</a:t>
-            </a:r>
-            <a:r>
-              <a:rPr lang="zh-CN" altLang="en-US" sz="5400" b="1" dirty="0" smtClean="0">
-                <a:solidFill>
-                  <a:srgbClr val="002060"/>
-                </a:solidFill>
-                <a:latin typeface="Microsoft JhengHei" panose="020B0604030504040204" pitchFamily="34" charset="-120"/>
-                <a:ea typeface="Microsoft JhengHei" panose="020B0604030504040204" pitchFamily="34" charset="-120"/>
-              </a:rPr>
-              <a:t>主  顯在言語和步武</a:t>
-            </a:r>
-            <a:endParaRPr lang="en-US" altLang="zh-CN" sz="5400" b="1" dirty="0" smtClean="0">
-              <a:solidFill>
-                <a:srgbClr val="002060"/>
-              </a:solidFill>
-              <a:latin typeface="Microsoft JhengHei" panose="020B0604030504040204" pitchFamily="34" charset="-120"/>
-              <a:ea typeface="Microsoft JhengHei" panose="020B0604030504040204" pitchFamily="34" charset="-120"/>
-            </a:endParaRPr>
-          </a:p>
-          <a:p>
-            <a:pPr marL="0" indent="0" algn="ctr">
-              <a:buNone/>
-            </a:pPr>
-            <a:r>
-              <a:rPr lang="zh-CN" altLang="en-US" sz="5400" b="1" dirty="0">
-                <a:solidFill>
-                  <a:srgbClr val="002060"/>
-                </a:solidFill>
-                <a:latin typeface="Microsoft JhengHei" panose="020B0604030504040204" pitchFamily="34" charset="-120"/>
-                <a:ea typeface="Microsoft JhengHei" panose="020B0604030504040204" pitchFamily="34" charset="-120"/>
-              </a:rPr>
-              <a:t>非我惟</a:t>
-            </a:r>
-            <a:r>
-              <a:rPr lang="zh-CN" altLang="en-US" sz="5400" b="1" dirty="0" smtClean="0">
-                <a:solidFill>
-                  <a:srgbClr val="002060"/>
-                </a:solidFill>
-                <a:latin typeface="Microsoft JhengHei" panose="020B0604030504040204" pitchFamily="34" charset="-120"/>
-                <a:ea typeface="Microsoft JhengHei" panose="020B0604030504040204" pitchFamily="34" charset="-120"/>
-              </a:rPr>
-              <a:t>主  顯在思想態度</a:t>
-            </a:r>
-            <a:endParaRPr lang="vi-VN" sz="5400" b="1" dirty="0">
-              <a:solidFill>
-                <a:srgbClr val="002060"/>
-              </a:solidFill>
-              <a:ea typeface="Microsoft JhengHei" panose="020B0604030504040204" pitchFamily="34" charset="-120"/>
-            </a:endParaRPr>
-          </a:p>
-        </p:txBody>
-      </p:sp>
-      <p:sp>
-        <p:nvSpPr>
-          <p:cNvPr id="4" name="TextBox 3"/>
-          <p:cNvSpPr txBox="1"/>
-          <p:nvPr/>
-        </p:nvSpPr>
-        <p:spPr>
-          <a:xfrm>
-            <a:off x="609600" y="1703070"/>
-            <a:ext cx="1074420" cy="923330"/>
-          </a:xfrm>
-          <a:prstGeom prst="rect">
-            <a:avLst/>
-          </a:prstGeom>
-          <a:noFill/>
-        </p:spPr>
-        <p:txBody>
-          <a:bodyPr wrap="square" rtlCol="0">
-            <a:spAutoFit/>
-          </a:bodyPr>
-          <a:lstStyle/>
-          <a:p>
-            <a:r>
-              <a:rPr lang="en-US" sz="5400" b="1" dirty="0" smtClean="0">
-                <a:solidFill>
-                  <a:srgbClr val="002060"/>
-                </a:solidFill>
-              </a:rPr>
-              <a:t>1.</a:t>
-            </a:r>
-            <a:endParaRPr lang="vi-VN" sz="5400" b="1" dirty="0">
-              <a:solidFill>
-                <a:srgbClr val="002060"/>
-              </a:solidFill>
+              <a:effectLst>
+                <a:outerShdw blurRad="38100" dist="38100" dir="2700000" algn="tl">
+                  <a:srgbClr val="000000">
+                    <a:alpha val="43137"/>
+                  </a:srgbClr>
+                </a:outerShdw>
+              </a:effectLst>
+              <a:latin typeface="微軟正黑體" pitchFamily="34" charset="-120"/>
+              <a:ea typeface="微軟正黑體" pitchFamily="34" charset="-120"/>
             </a:endParaRPr>
           </a:p>
         </p:txBody>
@@ -3340,7 +3236,7 @@
     </p:spTree>
     <p:extLst>
       <p:ext uri="{BB962C8B-B14F-4D97-AF65-F5344CB8AC3E}">
-        <p14:creationId xmlns:p14="http://schemas.microsoft.com/office/powerpoint/2010/main" val="49999756"/>
+        <p14:creationId xmlns:p14="http://schemas.microsoft.com/office/powerpoint/2010/main" val="3724263107"/>
       </p:ext>
     </p:extLst>
   </p:cSld>
@@ -3369,161 +3265,106 @@
       </p:grpSpPr>
       <p:sp>
         <p:nvSpPr>
-          <p:cNvPr id="2" name="Title 1"/>
-          <p:cNvSpPr>
-            <a:spLocks noGrp="1"/>
-          </p:cNvSpPr>
-          <p:nvPr>
-            <p:ph type="title"/>
-          </p:nvPr>
-        </p:nvSpPr>
-        <p:spPr/>
-        <p:txBody>
-          <a:bodyPr>
+          <p:cNvPr id="5" name="內容版面配置區 4"/>
+          <p:cNvSpPr>
+            <a:spLocks noGrp="1"/>
+          </p:cNvSpPr>
+          <p:nvPr>
+            <p:ph idx="1"/>
+          </p:nvPr>
+        </p:nvSpPr>
+        <p:spPr>
+          <a:xfrm>
+            <a:off x="0" y="2084851"/>
+            <a:ext cx="12192000" cy="2404863"/>
+          </a:xfrm>
+        </p:spPr>
+        <p:txBody>
+          <a:bodyPr anchor="ctr">
             <a:normAutofit/>
           </a:bodyPr>
           <a:lstStyle/>
           <a:p>
-            <a:r>
-              <a:rPr lang="zh-CN" altLang="en-US" sz="4800" b="1" dirty="0" smtClean="0">
-                <a:solidFill>
-                  <a:srgbClr val="002060"/>
-                </a:solidFill>
-                <a:latin typeface="Microsoft JhengHei" panose="020B0604030504040204" pitchFamily="34" charset="-120"/>
-                <a:ea typeface="Microsoft JhengHei" panose="020B0604030504040204" pitchFamily="34" charset="-120"/>
+            <a:pPr marL="0" indent="0" algn="ctr">
+              <a:buNone/>
+            </a:pPr>
+            <a:r>
+              <a:rPr lang="zh-CN" altLang="en-US" sz="6400" b="1" dirty="0">
+                <a:solidFill>
+                  <a:srgbClr val="000066"/>
+                </a:solidFill>
+                <a:latin typeface="Microsoft JhengHei" pitchFamily="34" charset="-120"/>
+                <a:ea typeface="Microsoft JhengHei" pitchFamily="34" charset="-120"/>
               </a:rPr>
-              <a:t>非我惟主</a:t>
-            </a:r>
-            <a:endParaRPr lang="vi-VN" sz="4800" b="1" dirty="0">
+              <a:t>主惟有主  今居我心裏為王</a:t>
+            </a:r>
+            <a:endParaRPr lang="en-US" altLang="zh-CN" sz="6400" b="1" dirty="0">
               <a:solidFill>
-                <a:srgbClr val="002060"/>
+                <a:srgbClr val="000066"/>
               </a:solidFill>
-              <a:ea typeface="Microsoft JhengHei" panose="020B0604030504040204" pitchFamily="34" charset="-120"/>
+              <a:latin typeface="Microsoft JhengHei" pitchFamily="34" charset="-120"/>
+              <a:ea typeface="Microsoft JhengHei" pitchFamily="34" charset="-120"/>
             </a:endParaRPr>
           </a:p>
-        </p:txBody>
-      </p:sp>
-      <p:sp>
-        <p:nvSpPr>
-          <p:cNvPr id="3" name="Content Placeholder 2"/>
-          <p:cNvSpPr>
-            <a:spLocks noGrp="1"/>
-          </p:cNvSpPr>
-          <p:nvPr>
-            <p:ph idx="1"/>
-          </p:nvPr>
-        </p:nvSpPr>
-        <p:spPr/>
-        <p:txBody>
-          <a:bodyPr>
-            <a:normAutofit/>
+          <a:p>
+            <a:pPr marL="0" indent="0" algn="ctr">
+              <a:buNone/>
+            </a:pPr>
+            <a:r>
+              <a:rPr lang="zh-CN" altLang="en-US" sz="6400" b="1" dirty="0">
+                <a:solidFill>
+                  <a:srgbClr val="000066"/>
+                </a:solidFill>
+                <a:latin typeface="Microsoft JhengHei" pitchFamily="34" charset="-120"/>
+                <a:ea typeface="Microsoft JhengHei" pitchFamily="34" charset="-120"/>
+              </a:rPr>
+              <a:t>主惟有主  全無急忙聲響</a:t>
+            </a:r>
+            <a:endParaRPr lang="en-US" altLang="zh-CN" sz="6400" b="1" dirty="0">
+              <a:solidFill>
+                <a:srgbClr val="000066"/>
+              </a:solidFill>
+              <a:latin typeface="Microsoft JhengHei" pitchFamily="34" charset="-120"/>
+              <a:ea typeface="Microsoft JhengHei" pitchFamily="34" charset="-120"/>
+            </a:endParaRPr>
+          </a:p>
+        </p:txBody>
+      </p:sp>
+      <p:sp>
+        <p:nvSpPr>
+          <p:cNvPr id="3" name="TextBox 2"/>
+          <p:cNvSpPr txBox="1"/>
+          <p:nvPr/>
+        </p:nvSpPr>
+        <p:spPr>
+          <a:xfrm>
+            <a:off x="0" y="5061182"/>
+            <a:ext cx="12192000" cy="584775"/>
+          </a:xfrm>
+          <a:prstGeom prst="rect">
+            <a:avLst/>
+          </a:prstGeom>
+          <a:noFill/>
+        </p:spPr>
+        <p:txBody>
+          <a:bodyPr wrap="square" rtlCol="0">
+            <a:spAutoFit/>
           </a:bodyPr>
           <a:lstStyle/>
           <a:p>
-            <a:pPr marL="0" indent="0" algn="ctr">
-              <a:buNone/>
-            </a:pPr>
-            <a:r>
-              <a:rPr lang="zh-CN" altLang="en-US" sz="5400" b="1" dirty="0" smtClean="0">
-                <a:solidFill>
-                  <a:srgbClr val="002060"/>
-                </a:solidFill>
-                <a:ea typeface="Microsoft JhengHei" panose="020B0604030504040204" pitchFamily="34" charset="-120"/>
+            <a:pPr algn="ctr"/>
+            <a:r>
+              <a:rPr lang="en-US" sz="3200" b="1" dirty="0">
+                <a:solidFill>
+                  <a:srgbClr val="000066"/>
+                </a:solidFill>
               </a:rPr>
-              <a:t>啊求主救我脫離自己</a:t>
-            </a:r>
-            <a:endParaRPr lang="en-US" altLang="zh-CN" sz="5400" b="1" dirty="0" smtClean="0">
+              <a:t>( 3 / 5 )</a:t>
+            </a:r>
+            <a:endParaRPr lang="vi-VN" sz="3200" b="1" dirty="0">
               <a:solidFill>
-                <a:srgbClr val="002060"/>
+                <a:srgbClr val="000066"/>
               </a:solidFill>
-              <a:ea typeface="Microsoft JhengHei" panose="020B0604030504040204" pitchFamily="34" charset="-120"/>
-            </a:endParaRPr>
-          </a:p>
-          <a:p>
-            <a:pPr marL="0" indent="0" algn="ctr">
-              <a:buNone/>
-            </a:pPr>
-            <a:r>
-              <a:rPr lang="zh-CN" altLang="en-US" sz="5400" b="1" dirty="0">
-                <a:solidFill>
-                  <a:srgbClr val="002060"/>
-                </a:solidFill>
-                <a:ea typeface="Microsoft JhengHei" panose="020B0604030504040204" pitchFamily="34" charset="-120"/>
-              </a:rPr>
-              <a:t>非</a:t>
-            </a:r>
-            <a:r>
-              <a:rPr lang="zh-CN" altLang="en-US" sz="5400" b="1" dirty="0" smtClean="0">
-                <a:solidFill>
-                  <a:srgbClr val="002060"/>
-                </a:solidFill>
-                <a:ea typeface="Microsoft JhengHei" panose="020B0604030504040204" pitchFamily="34" charset="-120"/>
-              </a:rPr>
-              <a:t>我惟主我求</a:t>
-            </a:r>
-            <a:endParaRPr lang="en-US" altLang="zh-CN" sz="5400" b="1" dirty="0" smtClean="0">
-              <a:solidFill>
-                <a:srgbClr val="002060"/>
-              </a:solidFill>
-              <a:ea typeface="Microsoft JhengHei" panose="020B0604030504040204" pitchFamily="34" charset="-120"/>
-            </a:endParaRPr>
-          </a:p>
-          <a:p>
-            <a:pPr marL="0" indent="0" algn="ctr">
-              <a:buNone/>
-            </a:pPr>
-            <a:r>
-              <a:rPr lang="zh-CN" altLang="en-US" sz="5400" b="1" dirty="0">
-                <a:solidFill>
-                  <a:srgbClr val="002060"/>
-                </a:solidFill>
-                <a:ea typeface="Microsoft JhengHei" panose="020B0604030504040204" pitchFamily="34" charset="-120"/>
-              </a:rPr>
-              <a:t>今後活</a:t>
-            </a:r>
-            <a:r>
-              <a:rPr lang="zh-CN" altLang="en-US" sz="5400" b="1" dirty="0" smtClean="0">
-                <a:solidFill>
-                  <a:srgbClr val="002060"/>
-                </a:solidFill>
-                <a:ea typeface="Microsoft JhengHei" panose="020B0604030504040204" pitchFamily="34" charset="-120"/>
-              </a:rPr>
-              <a:t>着不再是我</a:t>
-            </a:r>
-            <a:endParaRPr lang="en-US" altLang="zh-CN" sz="5400" b="1" dirty="0" smtClean="0">
-              <a:solidFill>
-                <a:srgbClr val="002060"/>
-              </a:solidFill>
-              <a:ea typeface="Microsoft JhengHei" panose="020B0604030504040204" pitchFamily="34" charset="-120"/>
-            </a:endParaRPr>
-          </a:p>
-          <a:p>
-            <a:pPr marL="0" indent="0" algn="ctr">
-              <a:buNone/>
-            </a:pPr>
-            <a:r>
-              <a:rPr lang="zh-CN" altLang="en-US" sz="5400" b="1" dirty="0" smtClean="0">
-                <a:solidFill>
-                  <a:srgbClr val="002060"/>
-                </a:solidFill>
-                <a:ea typeface="Microsoft JhengHei" panose="020B0604030504040204" pitchFamily="34" charset="-120"/>
-              </a:rPr>
-              <a:t>乃主為我</a:t>
-            </a:r>
-            <a:r>
-              <a:rPr lang="zh-CN" altLang="en-US" sz="5400" b="1" dirty="0">
-                <a:solidFill>
-                  <a:srgbClr val="002060"/>
-                </a:solidFill>
-                <a:ea typeface="Microsoft JhengHei" panose="020B0604030504040204" pitchFamily="34" charset="-120"/>
-              </a:rPr>
-              <a:t>活着</a:t>
-            </a:r>
-            <a:endParaRPr lang="vi-VN" sz="5400" b="1" dirty="0">
-              <a:solidFill>
-                <a:srgbClr val="002060"/>
-              </a:solidFill>
-              <a:ea typeface="Microsoft JhengHei" panose="020B0604030504040204" pitchFamily="34" charset="-120"/>
             </a:endParaRPr>
           </a:p>
         </p:txBody>
@@ -3531,7 +3372,1070 @@
     </p:spTree>
     <p:extLst>
       <p:ext uri="{BB962C8B-B14F-4D97-AF65-F5344CB8AC3E}">
-        <p14:creationId xmlns:p14="http://schemas.microsoft.com/office/powerpoint/2010/main" val="1914040897"/>
+        <p14:creationId xmlns:p14="http://schemas.microsoft.com/office/powerpoint/2010/main" val="1364512180"/>
+      </p:ext>
+    </p:extLst>
+  </p:cSld>
+  <p:clrMapOvr>
+    <a:masterClrMapping/>
+  </p:clrMapOvr>
+</p:sld>
+</file>
+
+<file path=ppt/slides/slide11.xml><?xml version="1.0" encoding="utf-8"?>
+<p:sld xmlns:a="http://schemas.openxmlformats.org/drawingml/2006/main" xmlns:r="http://schemas.openxmlformats.org/officeDocument/2006/relationships" xmlns:p="http://schemas.openxmlformats.org/presentationml/2006/main">
+  <p:cSld>
+    <p:spTree>
+      <p:nvGrpSpPr>
+        <p:cNvPr id="1" name=""/>
+        <p:cNvGrpSpPr/>
+        <p:nvPr/>
+      </p:nvGrpSpPr>
+      <p:grpSpPr>
+        <a:xfrm>
+          <a:off x="0" y="0"/>
+          <a:ext cx="0" cy="0"/>
+          <a:chOff x="0" y="0"/>
+          <a:chExt cx="0" cy="0"/>
+        </a:xfrm>
+      </p:grpSpPr>
+      <p:sp>
+        <p:nvSpPr>
+          <p:cNvPr id="5" name="內容版面配置區 4"/>
+          <p:cNvSpPr>
+            <a:spLocks noGrp="1"/>
+          </p:cNvSpPr>
+          <p:nvPr>
+            <p:ph idx="1"/>
+          </p:nvPr>
+        </p:nvSpPr>
+        <p:spPr>
+          <a:xfrm>
+            <a:off x="0" y="2084851"/>
+            <a:ext cx="12192000" cy="2404863"/>
+          </a:xfrm>
+        </p:spPr>
+        <p:txBody>
+          <a:bodyPr anchor="ctr">
+            <a:normAutofit/>
+          </a:bodyPr>
+          <a:lstStyle/>
+          <a:p>
+            <a:pPr marL="0" indent="0" algn="ctr">
+              <a:buNone/>
+            </a:pPr>
+            <a:r>
+              <a:rPr lang="zh-CN" altLang="en-US" sz="6400" b="1" dirty="0">
+                <a:solidFill>
+                  <a:srgbClr val="000066"/>
+                </a:solidFill>
+                <a:latin typeface="Microsoft JhengHei" pitchFamily="34" charset="-120"/>
+                <a:ea typeface="Microsoft JhengHei" pitchFamily="34" charset="-120"/>
+              </a:rPr>
+              <a:t>主惟有主  全無高傲的氣槪</a:t>
+            </a:r>
+            <a:endParaRPr lang="en-US" altLang="zh-CN" sz="6400" b="1" dirty="0">
+              <a:solidFill>
+                <a:srgbClr val="000066"/>
+              </a:solidFill>
+              <a:latin typeface="Microsoft JhengHei" pitchFamily="34" charset="-120"/>
+              <a:ea typeface="Microsoft JhengHei" pitchFamily="34" charset="-120"/>
+            </a:endParaRPr>
+          </a:p>
+          <a:p>
+            <a:pPr marL="0" indent="0" algn="ctr">
+              <a:buNone/>
+            </a:pPr>
+            <a:r>
+              <a:rPr lang="zh-CN" altLang="en-US" sz="6400" b="1" dirty="0">
+                <a:solidFill>
+                  <a:srgbClr val="000066"/>
+                </a:solidFill>
+                <a:latin typeface="Microsoft JhengHei" pitchFamily="34" charset="-120"/>
+                <a:ea typeface="Microsoft JhengHei" pitchFamily="34" charset="-120"/>
+              </a:rPr>
+              <a:t>主惟有主  全無自我存在</a:t>
+            </a:r>
+            <a:endParaRPr lang="vi-VN" sz="6400" b="1" dirty="0">
+              <a:solidFill>
+                <a:srgbClr val="000066"/>
+              </a:solidFill>
+              <a:ea typeface="Microsoft JhengHei" pitchFamily="34" charset="-120"/>
+            </a:endParaRPr>
+          </a:p>
+        </p:txBody>
+      </p:sp>
+      <p:sp>
+        <p:nvSpPr>
+          <p:cNvPr id="3" name="TextBox 2"/>
+          <p:cNvSpPr txBox="1"/>
+          <p:nvPr/>
+        </p:nvSpPr>
+        <p:spPr>
+          <a:xfrm>
+            <a:off x="0" y="5061182"/>
+            <a:ext cx="12192000" cy="584775"/>
+          </a:xfrm>
+          <a:prstGeom prst="rect">
+            <a:avLst/>
+          </a:prstGeom>
+          <a:noFill/>
+        </p:spPr>
+        <p:txBody>
+          <a:bodyPr wrap="square" rtlCol="0">
+            <a:spAutoFit/>
+          </a:bodyPr>
+          <a:lstStyle/>
+          <a:p>
+            <a:pPr algn="ctr"/>
+            <a:r>
+              <a:rPr lang="en-US" sz="3200" b="1" dirty="0">
+                <a:solidFill>
+                  <a:srgbClr val="000066"/>
+                </a:solidFill>
+              </a:rPr>
+              <a:t>( 3 / 5 )</a:t>
+            </a:r>
+            <a:endParaRPr lang="vi-VN" sz="3200" b="1" dirty="0">
+              <a:solidFill>
+                <a:srgbClr val="000066"/>
+              </a:solidFill>
+            </a:endParaRPr>
+          </a:p>
+        </p:txBody>
+      </p:sp>
+    </p:spTree>
+    <p:extLst>
+      <p:ext uri="{BB962C8B-B14F-4D97-AF65-F5344CB8AC3E}">
+        <p14:creationId xmlns:p14="http://schemas.microsoft.com/office/powerpoint/2010/main" val="3796405971"/>
+      </p:ext>
+    </p:extLst>
+  </p:cSld>
+  <p:clrMapOvr>
+    <a:masterClrMapping/>
+  </p:clrMapOvr>
+</p:sld>
+</file>
+
+<file path=ppt/slides/slide12.xml><?xml version="1.0" encoding="utf-8"?>
+<p:sld xmlns:a="http://schemas.openxmlformats.org/drawingml/2006/main" xmlns:r="http://schemas.openxmlformats.org/officeDocument/2006/relationships" xmlns:p="http://schemas.openxmlformats.org/presentationml/2006/main">
+  <p:cSld>
+    <p:spTree>
+      <p:nvGrpSpPr>
+        <p:cNvPr id="1" name=""/>
+        <p:cNvGrpSpPr/>
+        <p:nvPr/>
+      </p:nvGrpSpPr>
+      <p:grpSpPr>
+        <a:xfrm>
+          <a:off x="0" y="0"/>
+          <a:ext cx="0" cy="0"/>
+          <a:chOff x="0" y="0"/>
+          <a:chExt cx="0" cy="0"/>
+        </a:xfrm>
+      </p:grpSpPr>
+      <p:sp>
+        <p:nvSpPr>
+          <p:cNvPr id="5" name="內容版面配置區 4"/>
+          <p:cNvSpPr>
+            <a:spLocks noGrp="1"/>
+          </p:cNvSpPr>
+          <p:nvPr>
+            <p:ph idx="1"/>
+          </p:nvPr>
+        </p:nvSpPr>
+        <p:spPr>
+          <a:xfrm>
+            <a:off x="0" y="2084851"/>
+            <a:ext cx="12192000" cy="2404863"/>
+          </a:xfrm>
+        </p:spPr>
+        <p:txBody>
+          <a:bodyPr anchor="ctr">
+            <a:normAutofit/>
+          </a:bodyPr>
+          <a:lstStyle/>
+          <a:p>
+            <a:pPr marL="0" indent="0" algn="ctr">
+              <a:buNone/>
+            </a:pPr>
+            <a:r>
+              <a:rPr lang="zh-CN" altLang="en-US" sz="6400" b="1" dirty="0">
+                <a:solidFill>
+                  <a:srgbClr val="000066"/>
+                </a:solidFill>
+                <a:latin typeface="Microsoft JhengHei" pitchFamily="34" charset="-120"/>
+                <a:ea typeface="Microsoft JhengHei" pitchFamily="34" charset="-120"/>
+              </a:rPr>
+              <a:t>啊求主救我脫離自己</a:t>
+            </a:r>
+            <a:endParaRPr lang="en-US" altLang="zh-CN" sz="6400" b="1" dirty="0">
+              <a:solidFill>
+                <a:srgbClr val="000066"/>
+              </a:solidFill>
+              <a:latin typeface="Microsoft JhengHei" pitchFamily="34" charset="-120"/>
+              <a:ea typeface="Microsoft JhengHei" pitchFamily="34" charset="-120"/>
+            </a:endParaRPr>
+          </a:p>
+          <a:p>
+            <a:pPr marL="0" indent="0" algn="ctr">
+              <a:buNone/>
+            </a:pPr>
+            <a:r>
+              <a:rPr lang="zh-CN" altLang="en-US" sz="6400" b="1" dirty="0">
+                <a:solidFill>
+                  <a:srgbClr val="000066"/>
+                </a:solidFill>
+                <a:latin typeface="Microsoft JhengHei" pitchFamily="34" charset="-120"/>
+                <a:ea typeface="Microsoft JhengHei" pitchFamily="34" charset="-120"/>
+              </a:rPr>
+              <a:t>非我惟主我求</a:t>
+            </a:r>
+            <a:endParaRPr lang="en-US" altLang="zh-CN" sz="6400" b="1" dirty="0">
+              <a:solidFill>
+                <a:srgbClr val="000066"/>
+              </a:solidFill>
+              <a:latin typeface="Microsoft JhengHei" pitchFamily="34" charset="-120"/>
+              <a:ea typeface="Microsoft JhengHei" pitchFamily="34" charset="-120"/>
+            </a:endParaRPr>
+          </a:p>
+        </p:txBody>
+      </p:sp>
+    </p:spTree>
+    <p:extLst>
+      <p:ext uri="{BB962C8B-B14F-4D97-AF65-F5344CB8AC3E}">
+        <p14:creationId xmlns:p14="http://schemas.microsoft.com/office/powerpoint/2010/main" val="2076738167"/>
+      </p:ext>
+    </p:extLst>
+  </p:cSld>
+  <p:clrMapOvr>
+    <a:masterClrMapping/>
+  </p:clrMapOvr>
+</p:sld>
+</file>
+
+<file path=ppt/slides/slide13.xml><?xml version="1.0" encoding="utf-8"?>
+<p:sld xmlns:a="http://schemas.openxmlformats.org/drawingml/2006/main" xmlns:r="http://schemas.openxmlformats.org/officeDocument/2006/relationships" xmlns:p="http://schemas.openxmlformats.org/presentationml/2006/main">
+  <p:cSld>
+    <p:spTree>
+      <p:nvGrpSpPr>
+        <p:cNvPr id="1" name=""/>
+        <p:cNvGrpSpPr/>
+        <p:nvPr/>
+      </p:nvGrpSpPr>
+      <p:grpSpPr>
+        <a:xfrm>
+          <a:off x="0" y="0"/>
+          <a:ext cx="0" cy="0"/>
+          <a:chOff x="0" y="0"/>
+          <a:chExt cx="0" cy="0"/>
+        </a:xfrm>
+      </p:grpSpPr>
+      <p:sp>
+        <p:nvSpPr>
+          <p:cNvPr id="5" name="內容版面配置區 4"/>
+          <p:cNvSpPr>
+            <a:spLocks noGrp="1"/>
+          </p:cNvSpPr>
+          <p:nvPr>
+            <p:ph idx="1"/>
+          </p:nvPr>
+        </p:nvSpPr>
+        <p:spPr>
+          <a:xfrm>
+            <a:off x="0" y="2084851"/>
+            <a:ext cx="12192000" cy="2404863"/>
+          </a:xfrm>
+        </p:spPr>
+        <p:txBody>
+          <a:bodyPr anchor="ctr">
+            <a:normAutofit/>
+          </a:bodyPr>
+          <a:lstStyle/>
+          <a:p>
+            <a:pPr marL="0" indent="0" algn="ctr">
+              <a:buNone/>
+            </a:pPr>
+            <a:r>
+              <a:rPr lang="zh-CN" altLang="en-US" sz="6400" b="1" dirty="0">
+                <a:solidFill>
+                  <a:srgbClr val="000066"/>
+                </a:solidFill>
+                <a:latin typeface="Microsoft JhengHei" pitchFamily="34" charset="-120"/>
+                <a:ea typeface="Microsoft JhengHei" pitchFamily="34" charset="-120"/>
+              </a:rPr>
+              <a:t>今後活着不再是我</a:t>
+            </a:r>
+            <a:endParaRPr lang="en-US" altLang="zh-CN" sz="6400" b="1" dirty="0">
+              <a:solidFill>
+                <a:srgbClr val="000066"/>
+              </a:solidFill>
+              <a:latin typeface="Microsoft JhengHei" pitchFamily="34" charset="-120"/>
+              <a:ea typeface="Microsoft JhengHei" pitchFamily="34" charset="-120"/>
+            </a:endParaRPr>
+          </a:p>
+          <a:p>
+            <a:pPr marL="0" indent="0" algn="ctr">
+              <a:buNone/>
+            </a:pPr>
+            <a:r>
+              <a:rPr lang="zh-CN" altLang="en-US" sz="6400" b="1" dirty="0">
+                <a:solidFill>
+                  <a:srgbClr val="000066"/>
+                </a:solidFill>
+                <a:latin typeface="Microsoft JhengHei" pitchFamily="34" charset="-120"/>
+                <a:ea typeface="Microsoft JhengHei" pitchFamily="34" charset="-120"/>
+              </a:rPr>
+              <a:t>乃主為我活着</a:t>
+            </a:r>
+            <a:endParaRPr lang="vi-VN" sz="6400" b="1" dirty="0">
+              <a:solidFill>
+                <a:srgbClr val="000066"/>
+              </a:solidFill>
+              <a:ea typeface="Microsoft JhengHei" pitchFamily="34" charset="-120"/>
+            </a:endParaRPr>
+          </a:p>
+        </p:txBody>
+      </p:sp>
+    </p:spTree>
+    <p:extLst>
+      <p:ext uri="{BB962C8B-B14F-4D97-AF65-F5344CB8AC3E}">
+        <p14:creationId xmlns:p14="http://schemas.microsoft.com/office/powerpoint/2010/main" val="2330602232"/>
+      </p:ext>
+    </p:extLst>
+  </p:cSld>
+  <p:clrMapOvr>
+    <a:masterClrMapping/>
+  </p:clrMapOvr>
+</p:sld>
+</file>
+
+<file path=ppt/slides/slide14.xml><?xml version="1.0" encoding="utf-8"?>
+<p:sld xmlns:a="http://schemas.openxmlformats.org/drawingml/2006/main" xmlns:r="http://schemas.openxmlformats.org/officeDocument/2006/relationships" xmlns:p="http://schemas.openxmlformats.org/presentationml/2006/main">
+  <p:cSld>
+    <p:spTree>
+      <p:nvGrpSpPr>
+        <p:cNvPr id="1" name=""/>
+        <p:cNvGrpSpPr/>
+        <p:nvPr/>
+      </p:nvGrpSpPr>
+      <p:grpSpPr>
+        <a:xfrm>
+          <a:off x="0" y="0"/>
+          <a:ext cx="0" cy="0"/>
+          <a:chOff x="0" y="0"/>
+          <a:chExt cx="0" cy="0"/>
+        </a:xfrm>
+      </p:grpSpPr>
+      <p:sp>
+        <p:nvSpPr>
+          <p:cNvPr id="5" name="內容版面配置區 4"/>
+          <p:cNvSpPr>
+            <a:spLocks noGrp="1"/>
+          </p:cNvSpPr>
+          <p:nvPr>
+            <p:ph idx="1"/>
+          </p:nvPr>
+        </p:nvSpPr>
+        <p:spPr>
+          <a:xfrm>
+            <a:off x="0" y="2084851"/>
+            <a:ext cx="12192000" cy="2404863"/>
+          </a:xfrm>
+        </p:spPr>
+        <p:txBody>
+          <a:bodyPr anchor="ctr">
+            <a:normAutofit/>
+          </a:bodyPr>
+          <a:lstStyle/>
+          <a:p>
+            <a:pPr marL="0" indent="0" algn="ctr">
+              <a:buNone/>
+            </a:pPr>
+            <a:r>
+              <a:rPr lang="zh-CN" altLang="en-US" sz="6400" b="1" dirty="0">
+                <a:solidFill>
+                  <a:srgbClr val="000066"/>
+                </a:solidFill>
+                <a:latin typeface="Microsoft JhengHei" pitchFamily="34" charset="-120"/>
+                <a:ea typeface="Microsoft JhengHei" pitchFamily="34" charset="-120"/>
+              </a:rPr>
+              <a:t>非我惟主  供給我一切需用</a:t>
+            </a:r>
+            <a:endParaRPr lang="en-US" altLang="zh-CN" sz="6400" b="1" dirty="0">
+              <a:solidFill>
+                <a:srgbClr val="000066"/>
+              </a:solidFill>
+              <a:latin typeface="Microsoft JhengHei" pitchFamily="34" charset="-120"/>
+              <a:ea typeface="Microsoft JhengHei" pitchFamily="34" charset="-120"/>
+            </a:endParaRPr>
+          </a:p>
+          <a:p>
+            <a:pPr marL="0" indent="0" algn="ctr">
+              <a:buNone/>
+            </a:pPr>
+            <a:r>
+              <a:rPr lang="zh-CN" altLang="en-US" sz="6400" b="1" dirty="0">
+                <a:solidFill>
+                  <a:srgbClr val="000066"/>
+                </a:solidFill>
+                <a:latin typeface="Microsoft JhengHei" pitchFamily="34" charset="-120"/>
+                <a:ea typeface="Microsoft JhengHei" pitchFamily="34" charset="-120"/>
+              </a:rPr>
+              <a:t>主惟有主  康健能力滿豐</a:t>
+            </a:r>
+            <a:endParaRPr lang="en-US" altLang="zh-CN" sz="6400" b="1" dirty="0">
+              <a:solidFill>
+                <a:srgbClr val="000066"/>
+              </a:solidFill>
+              <a:latin typeface="Microsoft JhengHei" pitchFamily="34" charset="-120"/>
+              <a:ea typeface="Microsoft JhengHei" pitchFamily="34" charset="-120"/>
+            </a:endParaRPr>
+          </a:p>
+        </p:txBody>
+      </p:sp>
+      <p:sp>
+        <p:nvSpPr>
+          <p:cNvPr id="3" name="TextBox 2"/>
+          <p:cNvSpPr txBox="1"/>
+          <p:nvPr/>
+        </p:nvSpPr>
+        <p:spPr>
+          <a:xfrm>
+            <a:off x="0" y="5061182"/>
+            <a:ext cx="12192000" cy="584775"/>
+          </a:xfrm>
+          <a:prstGeom prst="rect">
+            <a:avLst/>
+          </a:prstGeom>
+          <a:noFill/>
+        </p:spPr>
+        <p:txBody>
+          <a:bodyPr wrap="square" rtlCol="0">
+            <a:spAutoFit/>
+          </a:bodyPr>
+          <a:lstStyle/>
+          <a:p>
+            <a:pPr algn="ctr"/>
+            <a:r>
+              <a:rPr lang="en-US" sz="3200" b="1" dirty="0">
+                <a:solidFill>
+                  <a:srgbClr val="000066"/>
+                </a:solidFill>
+              </a:rPr>
+              <a:t>( 4 / 5 )</a:t>
+            </a:r>
+            <a:endParaRPr lang="vi-VN" sz="3200" b="1" dirty="0">
+              <a:solidFill>
+                <a:srgbClr val="000066"/>
+              </a:solidFill>
+            </a:endParaRPr>
+          </a:p>
+        </p:txBody>
+      </p:sp>
+    </p:spTree>
+    <p:extLst>
+      <p:ext uri="{BB962C8B-B14F-4D97-AF65-F5344CB8AC3E}">
+        <p14:creationId xmlns:p14="http://schemas.microsoft.com/office/powerpoint/2010/main" val="2074404971"/>
+      </p:ext>
+    </p:extLst>
+  </p:cSld>
+  <p:clrMapOvr>
+    <a:masterClrMapping/>
+  </p:clrMapOvr>
+</p:sld>
+</file>
+
+<file path=ppt/slides/slide15.xml><?xml version="1.0" encoding="utf-8"?>
+<p:sld xmlns:a="http://schemas.openxmlformats.org/drawingml/2006/main" xmlns:r="http://schemas.openxmlformats.org/officeDocument/2006/relationships" xmlns:p="http://schemas.openxmlformats.org/presentationml/2006/main">
+  <p:cSld>
+    <p:spTree>
+      <p:nvGrpSpPr>
+        <p:cNvPr id="1" name=""/>
+        <p:cNvGrpSpPr/>
+        <p:nvPr/>
+      </p:nvGrpSpPr>
+      <p:grpSpPr>
+        <a:xfrm>
+          <a:off x="0" y="0"/>
+          <a:ext cx="0" cy="0"/>
+          <a:chOff x="0" y="0"/>
+          <a:chExt cx="0" cy="0"/>
+        </a:xfrm>
+      </p:grpSpPr>
+      <p:sp>
+        <p:nvSpPr>
+          <p:cNvPr id="5" name="內容版面配置區 4"/>
+          <p:cNvSpPr>
+            <a:spLocks noGrp="1"/>
+          </p:cNvSpPr>
+          <p:nvPr>
+            <p:ph idx="1"/>
+          </p:nvPr>
+        </p:nvSpPr>
+        <p:spPr>
+          <a:xfrm>
+            <a:off x="0" y="2084851"/>
+            <a:ext cx="12192000" cy="2404863"/>
+          </a:xfrm>
+        </p:spPr>
+        <p:txBody>
+          <a:bodyPr anchor="ctr">
+            <a:normAutofit/>
+          </a:bodyPr>
+          <a:lstStyle/>
+          <a:p>
+            <a:pPr marL="0" indent="0" algn="ctr">
+              <a:buNone/>
+            </a:pPr>
+            <a:r>
+              <a:rPr lang="zh-CN" altLang="en-US" sz="6400" b="1" dirty="0">
+                <a:solidFill>
+                  <a:srgbClr val="000066"/>
+                </a:solidFill>
+                <a:latin typeface="Microsoft JhengHei" pitchFamily="34" charset="-120"/>
+                <a:ea typeface="Microsoft JhengHei" pitchFamily="34" charset="-120"/>
+              </a:rPr>
+              <a:t>主惟有主  為我靈魂與身體</a:t>
+            </a:r>
+            <a:endParaRPr lang="en-US" altLang="zh-CN" sz="6400" b="1" dirty="0">
+              <a:solidFill>
+                <a:srgbClr val="000066"/>
+              </a:solidFill>
+              <a:latin typeface="Microsoft JhengHei" pitchFamily="34" charset="-120"/>
+              <a:ea typeface="Microsoft JhengHei" pitchFamily="34" charset="-120"/>
+            </a:endParaRPr>
+          </a:p>
+          <a:p>
+            <a:pPr marL="0" indent="0" algn="ctr">
+              <a:buNone/>
+            </a:pPr>
+            <a:r>
+              <a:rPr lang="zh-CN" altLang="en-US" sz="6400" b="1" dirty="0">
+                <a:solidFill>
+                  <a:srgbClr val="000066"/>
+                </a:solidFill>
+                <a:latin typeface="Microsoft JhengHei" pitchFamily="34" charset="-120"/>
+                <a:ea typeface="Microsoft JhengHei" pitchFamily="34" charset="-120"/>
+              </a:rPr>
+              <a:t>主惟有主  今我活著為你</a:t>
+            </a:r>
+            <a:endParaRPr lang="vi-VN" sz="6400" b="1" dirty="0">
+              <a:solidFill>
+                <a:srgbClr val="000066"/>
+              </a:solidFill>
+              <a:ea typeface="Microsoft JhengHei" pitchFamily="34" charset="-120"/>
+            </a:endParaRPr>
+          </a:p>
+        </p:txBody>
+      </p:sp>
+      <p:sp>
+        <p:nvSpPr>
+          <p:cNvPr id="3" name="TextBox 2"/>
+          <p:cNvSpPr txBox="1"/>
+          <p:nvPr/>
+        </p:nvSpPr>
+        <p:spPr>
+          <a:xfrm>
+            <a:off x="0" y="5061182"/>
+            <a:ext cx="12192000" cy="584775"/>
+          </a:xfrm>
+          <a:prstGeom prst="rect">
+            <a:avLst/>
+          </a:prstGeom>
+          <a:noFill/>
+        </p:spPr>
+        <p:txBody>
+          <a:bodyPr wrap="square" rtlCol="0">
+            <a:spAutoFit/>
+          </a:bodyPr>
+          <a:lstStyle/>
+          <a:p>
+            <a:pPr algn="ctr"/>
+            <a:r>
+              <a:rPr lang="en-US" sz="3200" b="1" dirty="0">
+                <a:solidFill>
+                  <a:srgbClr val="000066"/>
+                </a:solidFill>
+              </a:rPr>
+              <a:t>( 4 / 5 )</a:t>
+            </a:r>
+            <a:endParaRPr lang="vi-VN" sz="3200" b="1" dirty="0">
+              <a:solidFill>
+                <a:srgbClr val="000066"/>
+              </a:solidFill>
+            </a:endParaRPr>
+          </a:p>
+        </p:txBody>
+      </p:sp>
+    </p:spTree>
+    <p:extLst>
+      <p:ext uri="{BB962C8B-B14F-4D97-AF65-F5344CB8AC3E}">
+        <p14:creationId xmlns:p14="http://schemas.microsoft.com/office/powerpoint/2010/main" val="335277223"/>
+      </p:ext>
+    </p:extLst>
+  </p:cSld>
+  <p:clrMapOvr>
+    <a:masterClrMapping/>
+  </p:clrMapOvr>
+</p:sld>
+</file>
+
+<file path=ppt/slides/slide16.xml><?xml version="1.0" encoding="utf-8"?>
+<p:sld xmlns:a="http://schemas.openxmlformats.org/drawingml/2006/main" xmlns:r="http://schemas.openxmlformats.org/officeDocument/2006/relationships" xmlns:p="http://schemas.openxmlformats.org/presentationml/2006/main">
+  <p:cSld>
+    <p:spTree>
+      <p:nvGrpSpPr>
+        <p:cNvPr id="1" name=""/>
+        <p:cNvGrpSpPr/>
+        <p:nvPr/>
+      </p:nvGrpSpPr>
+      <p:grpSpPr>
+        <a:xfrm>
+          <a:off x="0" y="0"/>
+          <a:ext cx="0" cy="0"/>
+          <a:chOff x="0" y="0"/>
+          <a:chExt cx="0" cy="0"/>
+        </a:xfrm>
+      </p:grpSpPr>
+      <p:sp>
+        <p:nvSpPr>
+          <p:cNvPr id="5" name="內容版面配置區 4"/>
+          <p:cNvSpPr>
+            <a:spLocks noGrp="1"/>
+          </p:cNvSpPr>
+          <p:nvPr>
+            <p:ph idx="1"/>
+          </p:nvPr>
+        </p:nvSpPr>
+        <p:spPr>
+          <a:xfrm>
+            <a:off x="0" y="2084851"/>
+            <a:ext cx="12192000" cy="2404863"/>
+          </a:xfrm>
+        </p:spPr>
+        <p:txBody>
+          <a:bodyPr anchor="ctr">
+            <a:normAutofit/>
+          </a:bodyPr>
+          <a:lstStyle/>
+          <a:p>
+            <a:pPr marL="0" indent="0" algn="ctr">
+              <a:buNone/>
+            </a:pPr>
+            <a:r>
+              <a:rPr lang="zh-CN" altLang="en-US" sz="6400" b="1" dirty="0">
+                <a:solidFill>
+                  <a:srgbClr val="000066"/>
+                </a:solidFill>
+                <a:latin typeface="Microsoft JhengHei" pitchFamily="34" charset="-120"/>
+                <a:ea typeface="Microsoft JhengHei" pitchFamily="34" charset="-120"/>
+              </a:rPr>
+              <a:t>啊求主救我脫離自己</a:t>
+            </a:r>
+            <a:endParaRPr lang="en-US" altLang="zh-CN" sz="6400" b="1" dirty="0">
+              <a:solidFill>
+                <a:srgbClr val="000066"/>
+              </a:solidFill>
+              <a:latin typeface="Microsoft JhengHei" pitchFamily="34" charset="-120"/>
+              <a:ea typeface="Microsoft JhengHei" pitchFamily="34" charset="-120"/>
+            </a:endParaRPr>
+          </a:p>
+          <a:p>
+            <a:pPr marL="0" indent="0" algn="ctr">
+              <a:buNone/>
+            </a:pPr>
+            <a:r>
+              <a:rPr lang="zh-CN" altLang="en-US" sz="6400" b="1" dirty="0">
+                <a:solidFill>
+                  <a:srgbClr val="000066"/>
+                </a:solidFill>
+                <a:latin typeface="Microsoft JhengHei" pitchFamily="34" charset="-120"/>
+                <a:ea typeface="Microsoft JhengHei" pitchFamily="34" charset="-120"/>
+              </a:rPr>
+              <a:t>非我惟主我求</a:t>
+            </a:r>
+            <a:endParaRPr lang="en-US" altLang="zh-CN" sz="6400" b="1" dirty="0">
+              <a:solidFill>
+                <a:srgbClr val="000066"/>
+              </a:solidFill>
+              <a:latin typeface="Microsoft JhengHei" pitchFamily="34" charset="-120"/>
+              <a:ea typeface="Microsoft JhengHei" pitchFamily="34" charset="-120"/>
+            </a:endParaRPr>
+          </a:p>
+        </p:txBody>
+      </p:sp>
+    </p:spTree>
+    <p:extLst>
+      <p:ext uri="{BB962C8B-B14F-4D97-AF65-F5344CB8AC3E}">
+        <p14:creationId xmlns:p14="http://schemas.microsoft.com/office/powerpoint/2010/main" val="3315580922"/>
+      </p:ext>
+    </p:extLst>
+  </p:cSld>
+  <p:clrMapOvr>
+    <a:masterClrMapping/>
+  </p:clrMapOvr>
+</p:sld>
+</file>
+
+<file path=ppt/slides/slide17.xml><?xml version="1.0" encoding="utf-8"?>
+<p:sld xmlns:a="http://schemas.openxmlformats.org/drawingml/2006/main" xmlns:r="http://schemas.openxmlformats.org/officeDocument/2006/relationships" xmlns:p="http://schemas.openxmlformats.org/presentationml/2006/main">
+  <p:cSld>
+    <p:spTree>
+      <p:nvGrpSpPr>
+        <p:cNvPr id="1" name=""/>
+        <p:cNvGrpSpPr/>
+        <p:nvPr/>
+      </p:nvGrpSpPr>
+      <p:grpSpPr>
+        <a:xfrm>
+          <a:off x="0" y="0"/>
+          <a:ext cx="0" cy="0"/>
+          <a:chOff x="0" y="0"/>
+          <a:chExt cx="0" cy="0"/>
+        </a:xfrm>
+      </p:grpSpPr>
+      <p:sp>
+        <p:nvSpPr>
+          <p:cNvPr id="5" name="內容版面配置區 4"/>
+          <p:cNvSpPr>
+            <a:spLocks noGrp="1"/>
+          </p:cNvSpPr>
+          <p:nvPr>
+            <p:ph idx="1"/>
+          </p:nvPr>
+        </p:nvSpPr>
+        <p:spPr>
+          <a:xfrm>
+            <a:off x="0" y="2084851"/>
+            <a:ext cx="12192000" cy="2404863"/>
+          </a:xfrm>
+        </p:spPr>
+        <p:txBody>
+          <a:bodyPr anchor="ctr">
+            <a:normAutofit/>
+          </a:bodyPr>
+          <a:lstStyle/>
+          <a:p>
+            <a:pPr marL="0" indent="0" algn="ctr">
+              <a:buNone/>
+            </a:pPr>
+            <a:r>
+              <a:rPr lang="zh-CN" altLang="en-US" sz="6400" b="1" dirty="0">
+                <a:solidFill>
+                  <a:srgbClr val="000066"/>
+                </a:solidFill>
+                <a:latin typeface="Microsoft JhengHei" pitchFamily="34" charset="-120"/>
+                <a:ea typeface="Microsoft JhengHei" pitchFamily="34" charset="-120"/>
+              </a:rPr>
+              <a:t>今後活着不再是我</a:t>
+            </a:r>
+            <a:endParaRPr lang="en-US" altLang="zh-CN" sz="6400" b="1" dirty="0">
+              <a:solidFill>
+                <a:srgbClr val="000066"/>
+              </a:solidFill>
+              <a:latin typeface="Microsoft JhengHei" pitchFamily="34" charset="-120"/>
+              <a:ea typeface="Microsoft JhengHei" pitchFamily="34" charset="-120"/>
+            </a:endParaRPr>
+          </a:p>
+          <a:p>
+            <a:pPr marL="0" indent="0" algn="ctr">
+              <a:buNone/>
+            </a:pPr>
+            <a:r>
+              <a:rPr lang="zh-CN" altLang="en-US" sz="6400" b="1" dirty="0">
+                <a:solidFill>
+                  <a:srgbClr val="000066"/>
+                </a:solidFill>
+                <a:latin typeface="Microsoft JhengHei" pitchFamily="34" charset="-120"/>
+                <a:ea typeface="Microsoft JhengHei" pitchFamily="34" charset="-120"/>
+              </a:rPr>
+              <a:t>乃主為我活着</a:t>
+            </a:r>
+            <a:endParaRPr lang="vi-VN" sz="6400" b="1" dirty="0">
+              <a:solidFill>
+                <a:srgbClr val="000066"/>
+              </a:solidFill>
+              <a:ea typeface="Microsoft JhengHei" pitchFamily="34" charset="-120"/>
+            </a:endParaRPr>
+          </a:p>
+        </p:txBody>
+      </p:sp>
+    </p:spTree>
+    <p:extLst>
+      <p:ext uri="{BB962C8B-B14F-4D97-AF65-F5344CB8AC3E}">
+        <p14:creationId xmlns:p14="http://schemas.microsoft.com/office/powerpoint/2010/main" val="552091832"/>
+      </p:ext>
+    </p:extLst>
+  </p:cSld>
+  <p:clrMapOvr>
+    <a:masterClrMapping/>
+  </p:clrMapOvr>
+</p:sld>
+</file>
+
+<file path=ppt/slides/slide18.xml><?xml version="1.0" encoding="utf-8"?>
+<p:sld xmlns:a="http://schemas.openxmlformats.org/drawingml/2006/main" xmlns:r="http://schemas.openxmlformats.org/officeDocument/2006/relationships" xmlns:p="http://schemas.openxmlformats.org/presentationml/2006/main">
+  <p:cSld>
+    <p:spTree>
+      <p:nvGrpSpPr>
+        <p:cNvPr id="1" name=""/>
+        <p:cNvGrpSpPr/>
+        <p:nvPr/>
+      </p:nvGrpSpPr>
+      <p:grpSpPr>
+        <a:xfrm>
+          <a:off x="0" y="0"/>
+          <a:ext cx="0" cy="0"/>
+          <a:chOff x="0" y="0"/>
+          <a:chExt cx="0" cy="0"/>
+        </a:xfrm>
+      </p:grpSpPr>
+      <p:sp>
+        <p:nvSpPr>
+          <p:cNvPr id="5" name="內容版面配置區 4"/>
+          <p:cNvSpPr>
+            <a:spLocks noGrp="1"/>
+          </p:cNvSpPr>
+          <p:nvPr>
+            <p:ph idx="1"/>
+          </p:nvPr>
+        </p:nvSpPr>
+        <p:spPr>
+          <a:xfrm>
+            <a:off x="0" y="2084851"/>
+            <a:ext cx="12192000" cy="2404863"/>
+          </a:xfrm>
+        </p:spPr>
+        <p:txBody>
+          <a:bodyPr anchor="ctr">
+            <a:normAutofit/>
+          </a:bodyPr>
+          <a:lstStyle/>
+          <a:p>
+            <a:pPr marL="0" indent="0" algn="ctr">
+              <a:buNone/>
+            </a:pPr>
+            <a:r>
+              <a:rPr lang="zh-CN" altLang="en-US" sz="6400" b="1" dirty="0">
+                <a:solidFill>
+                  <a:srgbClr val="000066"/>
+                </a:solidFill>
+                <a:latin typeface="Microsoft JhengHei" pitchFamily="34" charset="-120"/>
+                <a:ea typeface="Microsoft JhengHei" pitchFamily="34" charset="-120"/>
+              </a:rPr>
+              <a:t>主惟有主  不久充滿我眼睛</a:t>
+            </a:r>
+            <a:endParaRPr lang="en-US" altLang="zh-CN" sz="6400" b="1" dirty="0">
+              <a:solidFill>
+                <a:srgbClr val="000066"/>
+              </a:solidFill>
+              <a:latin typeface="Microsoft JhengHei" pitchFamily="34" charset="-120"/>
+              <a:ea typeface="Microsoft JhengHei" pitchFamily="34" charset="-120"/>
+            </a:endParaRPr>
+          </a:p>
+          <a:p>
+            <a:pPr marL="0" indent="0" algn="ctr">
+              <a:buNone/>
+            </a:pPr>
+            <a:r>
+              <a:rPr lang="zh-CN" altLang="en-US" sz="6400" b="1" dirty="0">
+                <a:solidFill>
+                  <a:srgbClr val="000066"/>
+                </a:solidFill>
+                <a:latin typeface="Microsoft JhengHei" pitchFamily="34" charset="-120"/>
+                <a:ea typeface="Microsoft JhengHei" pitchFamily="34" charset="-120"/>
+              </a:rPr>
+              <a:t>主惟有主  不久就要顯明</a:t>
+            </a:r>
+            <a:endParaRPr lang="en-US" altLang="zh-CN" sz="6400" b="1" dirty="0">
+              <a:solidFill>
+                <a:srgbClr val="000066"/>
+              </a:solidFill>
+              <a:latin typeface="Microsoft JhengHei" pitchFamily="34" charset="-120"/>
+              <a:ea typeface="Microsoft JhengHei" pitchFamily="34" charset="-120"/>
+            </a:endParaRPr>
+          </a:p>
+        </p:txBody>
+      </p:sp>
+      <p:sp>
+        <p:nvSpPr>
+          <p:cNvPr id="3" name="TextBox 2"/>
+          <p:cNvSpPr txBox="1"/>
+          <p:nvPr/>
+        </p:nvSpPr>
+        <p:spPr>
+          <a:xfrm>
+            <a:off x="0" y="5061182"/>
+            <a:ext cx="12192000" cy="584775"/>
+          </a:xfrm>
+          <a:prstGeom prst="rect">
+            <a:avLst/>
+          </a:prstGeom>
+          <a:noFill/>
+        </p:spPr>
+        <p:txBody>
+          <a:bodyPr wrap="square" rtlCol="0">
+            <a:spAutoFit/>
+          </a:bodyPr>
+          <a:lstStyle/>
+          <a:p>
+            <a:pPr algn="ctr"/>
+            <a:r>
+              <a:rPr lang="en-US" sz="3200" b="1" dirty="0">
+                <a:solidFill>
+                  <a:srgbClr val="000066"/>
+                </a:solidFill>
+              </a:rPr>
+              <a:t>( 5 / 5 )</a:t>
+            </a:r>
+            <a:endParaRPr lang="vi-VN" sz="3200" b="1" dirty="0">
+              <a:solidFill>
+                <a:srgbClr val="000066"/>
+              </a:solidFill>
+            </a:endParaRPr>
+          </a:p>
+        </p:txBody>
+      </p:sp>
+    </p:spTree>
+    <p:extLst>
+      <p:ext uri="{BB962C8B-B14F-4D97-AF65-F5344CB8AC3E}">
+        <p14:creationId xmlns:p14="http://schemas.microsoft.com/office/powerpoint/2010/main" val="3890942078"/>
+      </p:ext>
+    </p:extLst>
+  </p:cSld>
+  <p:clrMapOvr>
+    <a:masterClrMapping/>
+  </p:clrMapOvr>
+</p:sld>
+</file>
+
+<file path=ppt/slides/slide19.xml><?xml version="1.0" encoding="utf-8"?>
+<p:sld xmlns:a="http://schemas.openxmlformats.org/drawingml/2006/main" xmlns:r="http://schemas.openxmlformats.org/officeDocument/2006/relationships" xmlns:p="http://schemas.openxmlformats.org/presentationml/2006/main">
+  <p:cSld>
+    <p:spTree>
+      <p:nvGrpSpPr>
+        <p:cNvPr id="1" name=""/>
+        <p:cNvGrpSpPr/>
+        <p:nvPr/>
+      </p:nvGrpSpPr>
+      <p:grpSpPr>
+        <a:xfrm>
+          <a:off x="0" y="0"/>
+          <a:ext cx="0" cy="0"/>
+          <a:chOff x="0" y="0"/>
+          <a:chExt cx="0" cy="0"/>
+        </a:xfrm>
+      </p:grpSpPr>
+      <p:sp>
+        <p:nvSpPr>
+          <p:cNvPr id="5" name="內容版面配置區 4"/>
+          <p:cNvSpPr>
+            <a:spLocks noGrp="1"/>
+          </p:cNvSpPr>
+          <p:nvPr>
+            <p:ph idx="1"/>
+          </p:nvPr>
+        </p:nvSpPr>
+        <p:spPr>
+          <a:xfrm>
+            <a:off x="0" y="2084851"/>
+            <a:ext cx="12192000" cy="2404863"/>
+          </a:xfrm>
+        </p:spPr>
+        <p:txBody>
+          <a:bodyPr anchor="ctr">
+            <a:normAutofit/>
+          </a:bodyPr>
+          <a:lstStyle/>
+          <a:p>
+            <a:pPr marL="0" indent="0" algn="ctr">
+              <a:buNone/>
+            </a:pPr>
+            <a:r>
+              <a:rPr lang="zh-CN" altLang="en-US" sz="6400" b="1" dirty="0">
+                <a:solidFill>
+                  <a:srgbClr val="000066"/>
+                </a:solidFill>
+                <a:latin typeface="Microsoft JhengHei" pitchFamily="34" charset="-120"/>
+                <a:ea typeface="Microsoft JhengHei" pitchFamily="34" charset="-120"/>
+              </a:rPr>
+              <a:t>主惟有主  一切所望都成全</a:t>
+            </a:r>
+            <a:endParaRPr lang="en-US" altLang="zh-CN" sz="6400" b="1" dirty="0">
+              <a:solidFill>
+                <a:srgbClr val="000066"/>
+              </a:solidFill>
+              <a:latin typeface="Microsoft JhengHei" pitchFamily="34" charset="-120"/>
+              <a:ea typeface="Microsoft JhengHei" pitchFamily="34" charset="-120"/>
+            </a:endParaRPr>
+          </a:p>
+          <a:p>
+            <a:pPr marL="0" indent="0" algn="ctr">
+              <a:buNone/>
+            </a:pPr>
+            <a:r>
+              <a:rPr lang="zh-CN" altLang="en-US" sz="6400" b="1" dirty="0">
+                <a:solidFill>
+                  <a:srgbClr val="000066"/>
+                </a:solidFill>
+                <a:latin typeface="Microsoft JhengHei" pitchFamily="34" charset="-120"/>
+                <a:ea typeface="Microsoft JhengHei" pitchFamily="34" charset="-120"/>
+              </a:rPr>
+              <a:t>主惟有主  永遠是我一切</a:t>
+            </a:r>
+            <a:endParaRPr lang="vi-VN" sz="6400" b="1" dirty="0">
+              <a:solidFill>
+                <a:srgbClr val="000066"/>
+              </a:solidFill>
+              <a:ea typeface="Microsoft JhengHei" pitchFamily="34" charset="-120"/>
+            </a:endParaRPr>
+          </a:p>
+        </p:txBody>
+      </p:sp>
+      <p:sp>
+        <p:nvSpPr>
+          <p:cNvPr id="3" name="TextBox 2"/>
+          <p:cNvSpPr txBox="1"/>
+          <p:nvPr/>
+        </p:nvSpPr>
+        <p:spPr>
+          <a:xfrm>
+            <a:off x="0" y="5061182"/>
+            <a:ext cx="12192000" cy="584775"/>
+          </a:xfrm>
+          <a:prstGeom prst="rect">
+            <a:avLst/>
+          </a:prstGeom>
+          <a:noFill/>
+        </p:spPr>
+        <p:txBody>
+          <a:bodyPr wrap="square" rtlCol="0">
+            <a:spAutoFit/>
+          </a:bodyPr>
+          <a:lstStyle/>
+          <a:p>
+            <a:pPr algn="ctr"/>
+            <a:r>
+              <a:rPr lang="en-US" sz="3200" b="1" dirty="0">
+                <a:solidFill>
+                  <a:srgbClr val="000066"/>
+                </a:solidFill>
+              </a:rPr>
+              <a:t>( 5 / 5 )</a:t>
+            </a:r>
+            <a:endParaRPr lang="vi-VN" sz="3200" b="1" dirty="0">
+              <a:solidFill>
+                <a:srgbClr val="000066"/>
+              </a:solidFill>
+            </a:endParaRPr>
+          </a:p>
+        </p:txBody>
+      </p:sp>
+    </p:spTree>
+    <p:extLst>
+      <p:ext uri="{BB962C8B-B14F-4D97-AF65-F5344CB8AC3E}">
+        <p14:creationId xmlns:p14="http://schemas.microsoft.com/office/powerpoint/2010/main" val="3493234458"/>
       </p:ext>
     </p:extLst>
   </p:cSld>
@@ -3560,161 +4464,106 @@
       </p:grpSpPr>
       <p:sp>
         <p:nvSpPr>
-          <p:cNvPr id="2" name="Title 1"/>
-          <p:cNvSpPr>
-            <a:spLocks noGrp="1"/>
-          </p:cNvSpPr>
-          <p:nvPr>
-            <p:ph type="title"/>
-          </p:nvPr>
-        </p:nvSpPr>
-        <p:spPr/>
-        <p:txBody>
-          <a:bodyPr>
+          <p:cNvPr id="5" name="內容版面配置區 4"/>
+          <p:cNvSpPr>
+            <a:spLocks noGrp="1"/>
+          </p:cNvSpPr>
+          <p:nvPr>
+            <p:ph idx="1"/>
+          </p:nvPr>
+        </p:nvSpPr>
+        <p:spPr>
+          <a:xfrm>
+            <a:off x="0" y="2084851"/>
+            <a:ext cx="12192000" cy="2404863"/>
+          </a:xfrm>
+        </p:spPr>
+        <p:txBody>
+          <a:bodyPr anchor="ctr">
             <a:normAutofit/>
           </a:bodyPr>
           <a:lstStyle/>
           <a:p>
-            <a:r>
-              <a:rPr lang="zh-CN" altLang="en-US" sz="4800" b="1" dirty="0" smtClean="0">
-                <a:solidFill>
-                  <a:srgbClr val="002060"/>
-                </a:solidFill>
-                <a:latin typeface="Microsoft JhengHei" panose="020B0604030504040204" pitchFamily="34" charset="-120"/>
-                <a:ea typeface="Microsoft JhengHei" panose="020B0604030504040204" pitchFamily="34" charset="-120"/>
+            <a:pPr marL="0" indent="0" algn="ctr">
+              <a:buNone/>
+            </a:pPr>
+            <a:r>
+              <a:rPr lang="zh-CN" altLang="en-US" sz="6400" b="1" dirty="0">
+                <a:solidFill>
+                  <a:srgbClr val="000066"/>
+                </a:solidFill>
+                <a:latin typeface="Microsoft JhengHei" pitchFamily="34" charset="-120"/>
+                <a:ea typeface="Microsoft JhengHei" pitchFamily="34" charset="-120"/>
               </a:rPr>
-              <a:t>非我惟主</a:t>
-            </a:r>
-            <a:endParaRPr lang="vi-VN" sz="4800" b="1" dirty="0">
+              <a:t>非我惟主  被人高舉並愛敬</a:t>
+            </a:r>
+            <a:endParaRPr lang="en-US" altLang="zh-CN" sz="6400" b="1" dirty="0">
               <a:solidFill>
-                <a:srgbClr val="002060"/>
+                <a:srgbClr val="000066"/>
               </a:solidFill>
-              <a:ea typeface="Microsoft JhengHei" panose="020B0604030504040204" pitchFamily="34" charset="-120"/>
+              <a:latin typeface="Microsoft JhengHei" pitchFamily="34" charset="-120"/>
+              <a:ea typeface="Microsoft JhengHei" pitchFamily="34" charset="-120"/>
             </a:endParaRPr>
           </a:p>
-        </p:txBody>
-      </p:sp>
-      <p:sp>
-        <p:nvSpPr>
-          <p:cNvPr id="3" name="Content Placeholder 2"/>
-          <p:cNvSpPr>
-            <a:spLocks noGrp="1"/>
-          </p:cNvSpPr>
-          <p:nvPr>
-            <p:ph idx="1"/>
-          </p:nvPr>
-        </p:nvSpPr>
-        <p:spPr/>
-        <p:txBody>
-          <a:bodyPr>
-            <a:normAutofit/>
+          <a:p>
+            <a:pPr marL="0" indent="0" algn="ctr">
+              <a:buNone/>
+            </a:pPr>
+            <a:r>
+              <a:rPr lang="zh-CN" altLang="en-US" sz="6400" b="1" dirty="0">
+                <a:solidFill>
+                  <a:srgbClr val="000066"/>
+                </a:solidFill>
+                <a:latin typeface="Microsoft JhengHei" pitchFamily="34" charset="-120"/>
+                <a:ea typeface="Microsoft JhengHei" pitchFamily="34" charset="-120"/>
+              </a:rPr>
+              <a:t>非我惟主  被人傳揚相信</a:t>
+            </a:r>
+            <a:endParaRPr lang="en-US" altLang="zh-CN" sz="6400" b="1" dirty="0">
+              <a:solidFill>
+                <a:srgbClr val="000066"/>
+              </a:solidFill>
+              <a:latin typeface="Microsoft JhengHei" pitchFamily="34" charset="-120"/>
+              <a:ea typeface="Microsoft JhengHei" pitchFamily="34" charset="-120"/>
+            </a:endParaRPr>
+          </a:p>
+        </p:txBody>
+      </p:sp>
+      <p:sp>
+        <p:nvSpPr>
+          <p:cNvPr id="3" name="TextBox 2"/>
+          <p:cNvSpPr txBox="1"/>
+          <p:nvPr/>
+        </p:nvSpPr>
+        <p:spPr>
+          <a:xfrm>
+            <a:off x="0" y="5061182"/>
+            <a:ext cx="12192000" cy="584775"/>
+          </a:xfrm>
+          <a:prstGeom prst="rect">
+            <a:avLst/>
+          </a:prstGeom>
+          <a:noFill/>
+        </p:spPr>
+        <p:txBody>
+          <a:bodyPr wrap="square" rtlCol="0">
+            <a:spAutoFit/>
           </a:bodyPr>
           <a:lstStyle/>
           <a:p>
-            <a:pPr marL="0" indent="0" algn="ctr">
-              <a:buNone/>
-            </a:pPr>
-            <a:r>
-              <a:rPr lang="zh-CN" altLang="en-US" sz="5400" b="1" dirty="0" smtClean="0">
-                <a:solidFill>
-                  <a:srgbClr val="002060"/>
-                </a:solidFill>
-                <a:ea typeface="Microsoft JhengHei" panose="020B0604030504040204" pitchFamily="34" charset="-120"/>
+            <a:pPr algn="ctr"/>
+            <a:r>
+              <a:rPr lang="en-US" sz="3200" b="1" dirty="0">
+                <a:solidFill>
+                  <a:srgbClr val="000066"/>
+                </a:solidFill>
               </a:rPr>
-              <a:t>啊求主救我脫離自己</a:t>
-            </a:r>
-            <a:endParaRPr lang="en-US" altLang="zh-CN" sz="5400" b="1" dirty="0" smtClean="0">
+              <a:t>( 1 / 5 )</a:t>
+            </a:r>
+            <a:endParaRPr lang="vi-VN" sz="3200" b="1" dirty="0">
               <a:solidFill>
-                <a:srgbClr val="002060"/>
+                <a:srgbClr val="000066"/>
               </a:solidFill>
-              <a:ea typeface="Microsoft JhengHei" panose="020B0604030504040204" pitchFamily="34" charset="-120"/>
-            </a:endParaRPr>
-          </a:p>
-          <a:p>
-            <a:pPr marL="0" indent="0" algn="ctr">
-              <a:buNone/>
-            </a:pPr>
-            <a:r>
-              <a:rPr lang="zh-CN" altLang="en-US" sz="5400" b="1" dirty="0">
-                <a:solidFill>
-                  <a:srgbClr val="002060"/>
-                </a:solidFill>
-                <a:ea typeface="Microsoft JhengHei" panose="020B0604030504040204" pitchFamily="34" charset="-120"/>
-              </a:rPr>
-              <a:t>非</a:t>
-            </a:r>
-            <a:r>
-              <a:rPr lang="zh-CN" altLang="en-US" sz="5400" b="1" dirty="0" smtClean="0">
-                <a:solidFill>
-                  <a:srgbClr val="002060"/>
-                </a:solidFill>
-                <a:ea typeface="Microsoft JhengHei" panose="020B0604030504040204" pitchFamily="34" charset="-120"/>
-              </a:rPr>
-              <a:t>我惟主我求</a:t>
-            </a:r>
-            <a:endParaRPr lang="en-US" altLang="zh-CN" sz="5400" b="1" dirty="0" smtClean="0">
-              <a:solidFill>
-                <a:srgbClr val="002060"/>
-              </a:solidFill>
-              <a:ea typeface="Microsoft JhengHei" panose="020B0604030504040204" pitchFamily="34" charset="-120"/>
-            </a:endParaRPr>
-          </a:p>
-          <a:p>
-            <a:pPr marL="0" indent="0" algn="ctr">
-              <a:buNone/>
-            </a:pPr>
-            <a:r>
-              <a:rPr lang="zh-CN" altLang="en-US" sz="5400" b="1" dirty="0">
-                <a:solidFill>
-                  <a:srgbClr val="002060"/>
-                </a:solidFill>
-                <a:ea typeface="Microsoft JhengHei" panose="020B0604030504040204" pitchFamily="34" charset="-120"/>
-              </a:rPr>
-              <a:t>今後活</a:t>
-            </a:r>
-            <a:r>
-              <a:rPr lang="zh-CN" altLang="en-US" sz="5400" b="1" dirty="0" smtClean="0">
-                <a:solidFill>
-                  <a:srgbClr val="002060"/>
-                </a:solidFill>
-                <a:ea typeface="Microsoft JhengHei" panose="020B0604030504040204" pitchFamily="34" charset="-120"/>
-              </a:rPr>
-              <a:t>着不再是我</a:t>
-            </a:r>
-            <a:endParaRPr lang="en-US" altLang="zh-CN" sz="5400" b="1" dirty="0" smtClean="0">
-              <a:solidFill>
-                <a:srgbClr val="002060"/>
-              </a:solidFill>
-              <a:ea typeface="Microsoft JhengHei" panose="020B0604030504040204" pitchFamily="34" charset="-120"/>
-            </a:endParaRPr>
-          </a:p>
-          <a:p>
-            <a:pPr marL="0" indent="0" algn="ctr">
-              <a:buNone/>
-            </a:pPr>
-            <a:r>
-              <a:rPr lang="zh-CN" altLang="en-US" sz="5400" b="1" dirty="0" smtClean="0">
-                <a:solidFill>
-                  <a:srgbClr val="002060"/>
-                </a:solidFill>
-                <a:ea typeface="Microsoft JhengHei" panose="020B0604030504040204" pitchFamily="34" charset="-120"/>
-              </a:rPr>
-              <a:t>乃主為我</a:t>
-            </a:r>
-            <a:r>
-              <a:rPr lang="zh-CN" altLang="en-US" sz="5400" b="1" dirty="0">
-                <a:solidFill>
-                  <a:srgbClr val="002060"/>
-                </a:solidFill>
-                <a:ea typeface="Microsoft JhengHei" panose="020B0604030504040204" pitchFamily="34" charset="-120"/>
-              </a:rPr>
-              <a:t>活着</a:t>
-            </a:r>
-            <a:endParaRPr lang="vi-VN" sz="5400" b="1" dirty="0">
-              <a:solidFill>
-                <a:srgbClr val="002060"/>
-              </a:solidFill>
-              <a:ea typeface="Microsoft JhengHei" panose="020B0604030504040204" pitchFamily="34" charset="-120"/>
             </a:endParaRPr>
           </a:p>
         </p:txBody>
@@ -3722,7 +4571,200 @@
     </p:spTree>
     <p:extLst>
       <p:ext uri="{BB962C8B-B14F-4D97-AF65-F5344CB8AC3E}">
-        <p14:creationId xmlns:p14="http://schemas.microsoft.com/office/powerpoint/2010/main" val="1952075822"/>
+        <p14:creationId xmlns:p14="http://schemas.microsoft.com/office/powerpoint/2010/main" val="1407003638"/>
+      </p:ext>
+    </p:extLst>
+  </p:cSld>
+  <p:clrMapOvr>
+    <a:masterClrMapping/>
+  </p:clrMapOvr>
+</p:sld>
+</file>
+
+<file path=ppt/slides/slide20.xml><?xml version="1.0" encoding="utf-8"?>
+<p:sld xmlns:a="http://schemas.openxmlformats.org/drawingml/2006/main" xmlns:r="http://schemas.openxmlformats.org/officeDocument/2006/relationships" xmlns:p="http://schemas.openxmlformats.org/presentationml/2006/main">
+  <p:cSld>
+    <p:spTree>
+      <p:nvGrpSpPr>
+        <p:cNvPr id="1" name=""/>
+        <p:cNvGrpSpPr/>
+        <p:nvPr/>
+      </p:nvGrpSpPr>
+      <p:grpSpPr>
+        <a:xfrm>
+          <a:off x="0" y="0"/>
+          <a:ext cx="0" cy="0"/>
+          <a:chOff x="0" y="0"/>
+          <a:chExt cx="0" cy="0"/>
+        </a:xfrm>
+      </p:grpSpPr>
+      <p:sp>
+        <p:nvSpPr>
+          <p:cNvPr id="5" name="內容版面配置區 4"/>
+          <p:cNvSpPr>
+            <a:spLocks noGrp="1"/>
+          </p:cNvSpPr>
+          <p:nvPr>
+            <p:ph idx="1"/>
+          </p:nvPr>
+        </p:nvSpPr>
+        <p:spPr>
+          <a:xfrm>
+            <a:off x="0" y="2084851"/>
+            <a:ext cx="12192000" cy="2404863"/>
+          </a:xfrm>
+        </p:spPr>
+        <p:txBody>
+          <a:bodyPr anchor="ctr">
+            <a:normAutofit/>
+          </a:bodyPr>
+          <a:lstStyle/>
+          <a:p>
+            <a:pPr marL="0" indent="0" algn="ctr">
+              <a:buNone/>
+            </a:pPr>
+            <a:r>
+              <a:rPr lang="zh-CN" altLang="en-US" sz="6400" b="1" dirty="0">
+                <a:solidFill>
+                  <a:srgbClr val="000066"/>
+                </a:solidFill>
+                <a:latin typeface="Microsoft JhengHei" pitchFamily="34" charset="-120"/>
+                <a:ea typeface="Microsoft JhengHei" pitchFamily="34" charset="-120"/>
+              </a:rPr>
+              <a:t>啊求主救我脫離自己</a:t>
+            </a:r>
+            <a:endParaRPr lang="en-US" altLang="zh-CN" sz="6400" b="1" dirty="0">
+              <a:solidFill>
+                <a:srgbClr val="000066"/>
+              </a:solidFill>
+              <a:latin typeface="Microsoft JhengHei" pitchFamily="34" charset="-120"/>
+              <a:ea typeface="Microsoft JhengHei" pitchFamily="34" charset="-120"/>
+            </a:endParaRPr>
+          </a:p>
+          <a:p>
+            <a:pPr marL="0" indent="0" algn="ctr">
+              <a:buNone/>
+            </a:pPr>
+            <a:r>
+              <a:rPr lang="zh-CN" altLang="en-US" sz="6400" b="1" dirty="0">
+                <a:solidFill>
+                  <a:srgbClr val="000066"/>
+                </a:solidFill>
+                <a:latin typeface="Microsoft JhengHei" pitchFamily="34" charset="-120"/>
+                <a:ea typeface="Microsoft JhengHei" pitchFamily="34" charset="-120"/>
+              </a:rPr>
+              <a:t>非我惟主我求</a:t>
+            </a:r>
+            <a:endParaRPr lang="en-US" altLang="zh-CN" sz="6400" b="1" dirty="0">
+              <a:solidFill>
+                <a:srgbClr val="000066"/>
+              </a:solidFill>
+              <a:latin typeface="Microsoft JhengHei" pitchFamily="34" charset="-120"/>
+              <a:ea typeface="Microsoft JhengHei" pitchFamily="34" charset="-120"/>
+            </a:endParaRPr>
+          </a:p>
+        </p:txBody>
+      </p:sp>
+    </p:spTree>
+    <p:extLst>
+      <p:ext uri="{BB962C8B-B14F-4D97-AF65-F5344CB8AC3E}">
+        <p14:creationId xmlns:p14="http://schemas.microsoft.com/office/powerpoint/2010/main" val="1221344343"/>
+      </p:ext>
+    </p:extLst>
+  </p:cSld>
+  <p:clrMapOvr>
+    <a:masterClrMapping/>
+  </p:clrMapOvr>
+</p:sld>
+</file>
+
+<file path=ppt/slides/slide21.xml><?xml version="1.0" encoding="utf-8"?>
+<p:sld xmlns:a="http://schemas.openxmlformats.org/drawingml/2006/main" xmlns:r="http://schemas.openxmlformats.org/officeDocument/2006/relationships" xmlns:p="http://schemas.openxmlformats.org/presentationml/2006/main">
+  <p:cSld>
+    <p:spTree>
+      <p:nvGrpSpPr>
+        <p:cNvPr id="1" name=""/>
+        <p:cNvGrpSpPr/>
+        <p:nvPr/>
+      </p:nvGrpSpPr>
+      <p:grpSpPr>
+        <a:xfrm>
+          <a:off x="0" y="0"/>
+          <a:ext cx="0" cy="0"/>
+          <a:chOff x="0" y="0"/>
+          <a:chExt cx="0" cy="0"/>
+        </a:xfrm>
+      </p:grpSpPr>
+      <p:sp>
+        <p:nvSpPr>
+          <p:cNvPr id="5" name="內容版面配置區 4"/>
+          <p:cNvSpPr>
+            <a:spLocks noGrp="1"/>
+          </p:cNvSpPr>
+          <p:nvPr>
+            <p:ph idx="1"/>
+          </p:nvPr>
+        </p:nvSpPr>
+        <p:spPr>
+          <a:xfrm>
+            <a:off x="0" y="2084851"/>
+            <a:ext cx="12192000" cy="2404863"/>
+          </a:xfrm>
+        </p:spPr>
+        <p:txBody>
+          <a:bodyPr anchor="ctr">
+            <a:normAutofit/>
+          </a:bodyPr>
+          <a:lstStyle/>
+          <a:p>
+            <a:pPr marL="0" indent="0" algn="ctr">
+              <a:buNone/>
+            </a:pPr>
+            <a:r>
+              <a:rPr lang="zh-CN" altLang="en-US" sz="6400" b="1" dirty="0">
+                <a:solidFill>
+                  <a:srgbClr val="000066"/>
+                </a:solidFill>
+                <a:latin typeface="Microsoft JhengHei" pitchFamily="34" charset="-120"/>
+                <a:ea typeface="Microsoft JhengHei" pitchFamily="34" charset="-120"/>
+              </a:rPr>
+              <a:t>今後活着不再是我</a:t>
+            </a:r>
+            <a:endParaRPr lang="en-US" altLang="zh-CN" sz="6400" b="1" dirty="0">
+              <a:solidFill>
+                <a:srgbClr val="000066"/>
+              </a:solidFill>
+              <a:latin typeface="Microsoft JhengHei" pitchFamily="34" charset="-120"/>
+              <a:ea typeface="Microsoft JhengHei" pitchFamily="34" charset="-120"/>
+            </a:endParaRPr>
+          </a:p>
+          <a:p>
+            <a:pPr marL="0" indent="0" algn="ctr">
+              <a:buNone/>
+            </a:pPr>
+            <a:r>
+              <a:rPr lang="zh-CN" altLang="en-US" sz="6400" b="1" dirty="0">
+                <a:solidFill>
+                  <a:srgbClr val="000066"/>
+                </a:solidFill>
+                <a:latin typeface="Microsoft JhengHei" pitchFamily="34" charset="-120"/>
+                <a:ea typeface="Microsoft JhengHei" pitchFamily="34" charset="-120"/>
+              </a:rPr>
+              <a:t>乃主為我活着</a:t>
+            </a:r>
+            <a:endParaRPr lang="vi-VN" sz="6400" b="1" dirty="0">
+              <a:solidFill>
+                <a:srgbClr val="000066"/>
+              </a:solidFill>
+              <a:ea typeface="Microsoft JhengHei" pitchFamily="34" charset="-120"/>
+            </a:endParaRPr>
+          </a:p>
+        </p:txBody>
+      </p:sp>
+    </p:spTree>
+    <p:extLst>
+      <p:ext uri="{BB962C8B-B14F-4D97-AF65-F5344CB8AC3E}">
+        <p14:creationId xmlns:p14="http://schemas.microsoft.com/office/powerpoint/2010/main" val="893915544"/>
       </p:ext>
     </p:extLst>
   </p:cSld>
@@ -3751,215 +4793,80 @@
       </p:grpSpPr>
       <p:sp>
         <p:nvSpPr>
-          <p:cNvPr id="2" name="Title 1"/>
-          <p:cNvSpPr>
-            <a:spLocks noGrp="1"/>
-          </p:cNvSpPr>
-          <p:nvPr>
-            <p:ph type="title"/>
-          </p:nvPr>
-        </p:nvSpPr>
-        <p:spPr/>
-        <p:txBody>
-          <a:bodyPr>
+          <p:cNvPr id="5" name="內容版面配置區 4"/>
+          <p:cNvSpPr>
+            <a:spLocks noGrp="1"/>
+          </p:cNvSpPr>
+          <p:nvPr>
+            <p:ph idx="1"/>
+          </p:nvPr>
+        </p:nvSpPr>
+        <p:spPr>
+          <a:xfrm>
+            <a:off x="0" y="2084851"/>
+            <a:ext cx="12192000" cy="2404863"/>
+          </a:xfrm>
+        </p:spPr>
+        <p:txBody>
+          <a:bodyPr anchor="ctr">
             <a:normAutofit/>
           </a:bodyPr>
           <a:lstStyle/>
           <a:p>
-            <a:r>
-              <a:rPr lang="zh-CN" altLang="en-US" sz="4800" b="1" dirty="0" smtClean="0">
-                <a:solidFill>
-                  <a:srgbClr val="002060"/>
-                </a:solidFill>
-                <a:latin typeface="Microsoft JhengHei" panose="020B0604030504040204" pitchFamily="34" charset="-120"/>
-                <a:ea typeface="Microsoft JhengHei" panose="020B0604030504040204" pitchFamily="34" charset="-120"/>
+            <a:pPr marL="0" indent="0" algn="ctr">
+              <a:buNone/>
+            </a:pPr>
+            <a:r>
+              <a:rPr lang="zh-CN" altLang="en-US" sz="6400" b="1" dirty="0">
+                <a:solidFill>
+                  <a:srgbClr val="000066"/>
+                </a:solidFill>
+                <a:latin typeface="Microsoft JhengHei" pitchFamily="34" charset="-120"/>
+                <a:ea typeface="Microsoft JhengHei" pitchFamily="34" charset="-120"/>
               </a:rPr>
-              <a:t>非我惟主</a:t>
-            </a:r>
-            <a:endParaRPr lang="vi-VN" sz="4800" b="1" dirty="0">
+              <a:t>非我惟主  顯在言語和步武</a:t>
+            </a:r>
+            <a:endParaRPr lang="en-US" altLang="zh-CN" sz="6400" b="1" dirty="0">
               <a:solidFill>
-                <a:srgbClr val="002060"/>
+                <a:srgbClr val="000066"/>
               </a:solidFill>
-              <a:ea typeface="Microsoft JhengHei" panose="020B0604030504040204" pitchFamily="34" charset="-120"/>
+              <a:latin typeface="Microsoft JhengHei" pitchFamily="34" charset="-120"/>
+              <a:ea typeface="Microsoft JhengHei" pitchFamily="34" charset="-120"/>
             </a:endParaRPr>
           </a:p>
-        </p:txBody>
-      </p:sp>
-      <p:sp>
-        <p:nvSpPr>
-          <p:cNvPr id="3" name="Content Placeholder 2"/>
-          <p:cNvSpPr>
-            <a:spLocks noGrp="1"/>
-          </p:cNvSpPr>
-          <p:nvPr>
-            <p:ph idx="1"/>
-          </p:nvPr>
-        </p:nvSpPr>
-        <p:spPr/>
-        <p:txBody>
-          <a:bodyPr>
-            <a:normAutofit/>
-          </a:bodyPr>
-          <a:lstStyle/>
           <a:p>
             <a:pPr marL="0" indent="0" algn="ctr">
               <a:buNone/>
             </a:pPr>
             <a:r>
-              <a:rPr lang="zh-CN" altLang="en-US" sz="5400" b="1" dirty="0">
-                <a:solidFill>
-                  <a:srgbClr val="002060"/>
-                </a:solidFill>
-                <a:latin typeface="Microsoft JhengHei" panose="020B0604030504040204" pitchFamily="34" charset="-120"/>
-                <a:ea typeface="Microsoft JhengHei" panose="020B0604030504040204" pitchFamily="34" charset="-120"/>
+              <a:rPr lang="zh-CN" altLang="en-US" sz="6400" b="1" dirty="0">
+                <a:solidFill>
+                  <a:srgbClr val="000066"/>
+                </a:solidFill>
+                <a:latin typeface="Microsoft JhengHei" pitchFamily="34" charset="-120"/>
+                <a:ea typeface="Microsoft JhengHei" pitchFamily="34" charset="-120"/>
               </a:rPr>
-              <a:t>非我惟主  憂傷時主施</a:t>
-            </a:r>
-            <a:r>
-              <a:rPr lang="zh-CN" altLang="en-US" sz="5400" b="1" dirty="0" smtClean="0">
-                <a:solidFill>
-                  <a:srgbClr val="002060"/>
-                </a:solidFill>
-                <a:latin typeface="Microsoft JhengHei" panose="020B0604030504040204" pitchFamily="34" charset="-120"/>
-                <a:ea typeface="Microsoft JhengHei" panose="020B0604030504040204" pitchFamily="34" charset="-120"/>
-              </a:rPr>
-              <a:t>撫慰</a:t>
-            </a:r>
-            <a:endParaRPr lang="en-US" altLang="zh-CN" sz="5400" b="1" dirty="0" smtClean="0">
+              <a:t>非我惟主  顯在思想態度</a:t>
+            </a:r>
+            <a:endParaRPr lang="vi-VN" sz="6400" b="1" dirty="0">
               <a:solidFill>
-                <a:srgbClr val="002060"/>
+                <a:srgbClr val="000066"/>
               </a:solidFill>
-              <a:latin typeface="Microsoft JhengHei" panose="020B0604030504040204" pitchFamily="34" charset="-120"/>
-              <a:ea typeface="Microsoft JhengHei" panose="020B0604030504040204" pitchFamily="34" charset="-120"/>
+              <a:ea typeface="Microsoft JhengHei" pitchFamily="34" charset="-120"/>
             </a:endParaRPr>
           </a:p>
-          <a:p>
-            <a:pPr marL="0" indent="0" algn="ctr">
-              <a:buNone/>
-            </a:pPr>
-            <a:r>
-              <a:rPr lang="zh-CN" altLang="en-US" sz="5400" b="1" dirty="0">
-                <a:solidFill>
-                  <a:srgbClr val="002060"/>
-                </a:solidFill>
-                <a:latin typeface="Microsoft JhengHei" panose="020B0604030504040204" pitchFamily="34" charset="-120"/>
-                <a:ea typeface="Microsoft JhengHei" panose="020B0604030504040204" pitchFamily="34" charset="-120"/>
-              </a:rPr>
-              <a:t>非我惟</a:t>
-            </a:r>
-            <a:r>
-              <a:rPr lang="zh-CN" altLang="en-US" sz="5400" b="1" dirty="0" smtClean="0">
-                <a:solidFill>
-                  <a:srgbClr val="002060"/>
-                </a:solidFill>
-                <a:latin typeface="Microsoft JhengHei" panose="020B0604030504040204" pitchFamily="34" charset="-120"/>
-                <a:ea typeface="Microsoft JhengHei" panose="020B0604030504040204" pitchFamily="34" charset="-120"/>
-              </a:rPr>
-              <a:t>主  擦去一切眼淚</a:t>
-            </a:r>
-            <a:endParaRPr lang="en-US" altLang="zh-CN" sz="5400" b="1" dirty="0" smtClean="0">
-              <a:solidFill>
-                <a:srgbClr val="002060"/>
-              </a:solidFill>
-              <a:latin typeface="Microsoft JhengHei" panose="020B0604030504040204" pitchFamily="34" charset="-120"/>
-              <a:ea typeface="Microsoft JhengHei" panose="020B0604030504040204" pitchFamily="34" charset="-120"/>
-            </a:endParaRPr>
-          </a:p>
-          <a:p>
-            <a:pPr marL="0" indent="0" algn="ctr">
-              <a:buNone/>
-            </a:pPr>
-            <a:r>
-              <a:rPr lang="zh-CN" altLang="en-US" sz="5400" b="1" dirty="0" smtClean="0">
-                <a:solidFill>
-                  <a:srgbClr val="002060"/>
-                </a:solidFill>
-                <a:latin typeface="Microsoft JhengHei" panose="020B0604030504040204" pitchFamily="34" charset="-120"/>
-                <a:ea typeface="Microsoft JhengHei" panose="020B0604030504040204" pitchFamily="34" charset="-120"/>
-              </a:rPr>
-              <a:t>非</a:t>
-            </a:r>
-            <a:r>
-              <a:rPr lang="zh-CN" altLang="en-US" sz="5400" b="1" dirty="0">
-                <a:solidFill>
-                  <a:srgbClr val="002060"/>
-                </a:solidFill>
-                <a:latin typeface="Microsoft JhengHei" panose="020B0604030504040204" pitchFamily="34" charset="-120"/>
-                <a:ea typeface="Microsoft JhengHei" panose="020B0604030504040204" pitchFamily="34" charset="-120"/>
-              </a:rPr>
-              <a:t>我惟主  將苦惱擔子</a:t>
-            </a:r>
-            <a:r>
-              <a:rPr lang="zh-CN" altLang="en-US" sz="5400" b="1" dirty="0" smtClean="0">
-                <a:solidFill>
-                  <a:srgbClr val="002060"/>
-                </a:solidFill>
-                <a:latin typeface="Microsoft JhengHei" panose="020B0604030504040204" pitchFamily="34" charset="-120"/>
-                <a:ea typeface="Microsoft JhengHei" panose="020B0604030504040204" pitchFamily="34" charset="-120"/>
-              </a:rPr>
-              <a:t>挑起</a:t>
-            </a:r>
-            <a:endParaRPr lang="en-US" altLang="zh-CN" sz="5400" b="1" dirty="0" smtClean="0">
-              <a:solidFill>
-                <a:srgbClr val="002060"/>
-              </a:solidFill>
-              <a:latin typeface="Microsoft JhengHei" panose="020B0604030504040204" pitchFamily="34" charset="-120"/>
-              <a:ea typeface="Microsoft JhengHei" panose="020B0604030504040204" pitchFamily="34" charset="-120"/>
-            </a:endParaRPr>
-          </a:p>
-          <a:p>
-            <a:pPr marL="0" indent="0" algn="ctr">
-              <a:buNone/>
-            </a:pPr>
-            <a:r>
-              <a:rPr lang="zh-CN" altLang="en-US" sz="5400" b="1" dirty="0" smtClean="0">
-                <a:solidFill>
-                  <a:srgbClr val="002060"/>
-                </a:solidFill>
-                <a:latin typeface="Microsoft JhengHei" panose="020B0604030504040204" pitchFamily="34" charset="-120"/>
-                <a:ea typeface="Microsoft JhengHei" panose="020B0604030504040204" pitchFamily="34" charset="-120"/>
-              </a:rPr>
-              <a:t>非</a:t>
-            </a:r>
-            <a:r>
-              <a:rPr lang="zh-CN" altLang="en-US" sz="5400" b="1" dirty="0">
-                <a:solidFill>
-                  <a:srgbClr val="002060"/>
-                </a:solidFill>
-                <a:latin typeface="Microsoft JhengHei" panose="020B0604030504040204" pitchFamily="34" charset="-120"/>
-                <a:ea typeface="Microsoft JhengHei" panose="020B0604030504040204" pitchFamily="34" charset="-120"/>
-              </a:rPr>
-              <a:t>我惟</a:t>
-            </a:r>
-            <a:r>
-              <a:rPr lang="zh-CN" altLang="en-US" sz="5400" b="1" dirty="0" smtClean="0">
-                <a:solidFill>
-                  <a:srgbClr val="002060"/>
-                </a:solidFill>
-                <a:latin typeface="Microsoft JhengHei" panose="020B0604030504040204" pitchFamily="34" charset="-120"/>
-                <a:ea typeface="Microsoft JhengHei" panose="020B0604030504040204" pitchFamily="34" charset="-120"/>
-              </a:rPr>
-              <a:t>主  消除一切畏懼</a:t>
-            </a:r>
-            <a:endParaRPr lang="vi-VN" sz="5400" b="1" dirty="0">
-              <a:solidFill>
-                <a:srgbClr val="002060"/>
-              </a:solidFill>
-              <a:ea typeface="Microsoft JhengHei" panose="020B0604030504040204" pitchFamily="34" charset="-120"/>
-            </a:endParaRPr>
-          </a:p>
-        </p:txBody>
-      </p:sp>
-      <p:sp>
-        <p:nvSpPr>
-          <p:cNvPr id="4" name="TextBox 3"/>
+        </p:txBody>
+      </p:sp>
+      <p:sp>
+        <p:nvSpPr>
+          <p:cNvPr id="3" name="TextBox 2"/>
           <p:cNvSpPr txBox="1"/>
           <p:nvPr/>
         </p:nvSpPr>
         <p:spPr>
           <a:xfrm>
-            <a:off x="609600" y="1703070"/>
-            <a:ext cx="1074420" cy="923330"/>
+            <a:off x="0" y="5061182"/>
+            <a:ext cx="12192000" cy="584775"/>
           </a:xfrm>
           <a:prstGeom prst="rect">
             <a:avLst/>
@@ -3972,25 +4879,18 @@
           </a:bodyPr>
           <a:lstStyle/>
           <a:p>
-            <a:r>
-              <a:rPr lang="en-US" sz="5400" b="1" dirty="0">
-                <a:solidFill>
-                  <a:srgbClr val="002060"/>
+            <a:pPr algn="ctr"/>
+            <a:r>
+              <a:rPr lang="en-US" sz="3200" b="1" dirty="0">
+                <a:solidFill>
+                  <a:srgbClr val="000066"/>
                 </a:solidFill>
               </a:rPr>
-              <a:t>2</a:t>
-            </a:r>
-            <a:r>
-              <a:rPr lang="en-US" sz="5400" b="1" dirty="0" smtClean="0">
-                <a:solidFill>
-                  <a:srgbClr val="002060"/>
-                </a:solidFill>
-              </a:rPr>
-              <a:t>.</a:t>
-            </a:r>
-            <a:endParaRPr lang="vi-VN" sz="5400" b="1" dirty="0">
+              <a:t>( 1 / 5 )</a:t>
+            </a:r>
+            <a:endParaRPr lang="vi-VN" sz="3200" b="1" dirty="0">
               <a:solidFill>
-                <a:srgbClr val="002060"/>
+                <a:srgbClr val="000066"/>
               </a:solidFill>
             </a:endParaRPr>
           </a:p>
@@ -3999,7 +4899,7 @@
     </p:spTree>
     <p:extLst>
       <p:ext uri="{BB962C8B-B14F-4D97-AF65-F5344CB8AC3E}">
-        <p14:creationId xmlns:p14="http://schemas.microsoft.com/office/powerpoint/2010/main" val="3621204833"/>
+        <p14:creationId xmlns:p14="http://schemas.microsoft.com/office/powerpoint/2010/main" val="1594534828"/>
       </p:ext>
     </p:extLst>
   </p:cSld>
@@ -4028,74 +4928,45 @@
       </p:grpSpPr>
       <p:sp>
         <p:nvSpPr>
-          <p:cNvPr id="2" name="Title 1"/>
-          <p:cNvSpPr>
-            <a:spLocks noGrp="1"/>
-          </p:cNvSpPr>
-          <p:nvPr>
-            <p:ph type="title"/>
-          </p:nvPr>
-        </p:nvSpPr>
-        <p:spPr/>
-        <p:txBody>
-          <a:bodyPr>
+          <p:cNvPr id="5" name="內容版面配置區 4"/>
+          <p:cNvSpPr>
+            <a:spLocks noGrp="1"/>
+          </p:cNvSpPr>
+          <p:nvPr>
+            <p:ph idx="1"/>
+          </p:nvPr>
+        </p:nvSpPr>
+        <p:spPr>
+          <a:xfrm>
+            <a:off x="0" y="2084851"/>
+            <a:ext cx="12192000" cy="2404863"/>
+          </a:xfrm>
+        </p:spPr>
+        <p:txBody>
+          <a:bodyPr anchor="ctr">
             <a:normAutofit/>
           </a:bodyPr>
           <a:lstStyle/>
           <a:p>
-            <a:r>
-              <a:rPr lang="zh-CN" altLang="en-US" sz="4800" b="1" dirty="0" smtClean="0">
-                <a:solidFill>
-                  <a:srgbClr val="002060"/>
-                </a:solidFill>
-                <a:latin typeface="Microsoft JhengHei" panose="020B0604030504040204" pitchFamily="34" charset="-120"/>
-                <a:ea typeface="Microsoft JhengHei" panose="020B0604030504040204" pitchFamily="34" charset="-120"/>
-              </a:rPr>
-              <a:t>非我惟主</a:t>
-            </a:r>
-            <a:endParaRPr lang="vi-VN" sz="4800" b="1" dirty="0">
-              <a:solidFill>
-                <a:srgbClr val="002060"/>
-              </a:solidFill>
-              <a:ea typeface="Microsoft JhengHei" panose="020B0604030504040204" pitchFamily="34" charset="-120"/>
-            </a:endParaRPr>
-          </a:p>
-        </p:txBody>
-      </p:sp>
-      <p:sp>
-        <p:nvSpPr>
-          <p:cNvPr id="3" name="Content Placeholder 2"/>
-          <p:cNvSpPr>
-            <a:spLocks noGrp="1"/>
-          </p:cNvSpPr>
-          <p:nvPr>
-            <p:ph idx="1"/>
-          </p:nvPr>
-        </p:nvSpPr>
-        <p:spPr/>
-        <p:txBody>
-          <a:bodyPr>
-            <a:normAutofit/>
-          </a:bodyPr>
-          <a:lstStyle/>
-          <a:p>
             <a:pPr marL="0" indent="0" algn="ctr">
               <a:buNone/>
             </a:pPr>
             <a:r>
-              <a:rPr lang="zh-CN" altLang="en-US" sz="5400" b="1" dirty="0" smtClean="0">
-                <a:solidFill>
-                  <a:srgbClr val="002060"/>
-                </a:solidFill>
-                <a:ea typeface="Microsoft JhengHei" panose="020B0604030504040204" pitchFamily="34" charset="-120"/>
+              <a:rPr lang="zh-CN" altLang="en-US" sz="6400" b="1" dirty="0">
+                <a:solidFill>
+                  <a:srgbClr val="000066"/>
+                </a:solidFill>
+                <a:latin typeface="Microsoft JhengHei" pitchFamily="34" charset="-120"/>
+                <a:ea typeface="Microsoft JhengHei" pitchFamily="34" charset="-120"/>
               </a:rPr>
               <a:t>啊求主救我脫離自己</a:t>
             </a:r>
-            <a:endParaRPr lang="en-US" altLang="zh-CN" sz="5400" b="1" dirty="0" smtClean="0">
+            <a:endParaRPr lang="en-US" altLang="zh-CN" sz="6400" b="1" dirty="0">
               <a:solidFill>
-                <a:srgbClr val="002060"/>
+                <a:srgbClr val="000066"/>
               </a:solidFill>
-              <a:ea typeface="Microsoft JhengHei" panose="020B0604030504040204" pitchFamily="34" charset="-120"/>
+              <a:latin typeface="Microsoft JhengHei" pitchFamily="34" charset="-120"/>
+              <a:ea typeface="Microsoft JhengHei" pitchFamily="34" charset="-120"/>
             </a:endParaRPr>
           </a:p>
           <a:p>
@@ -4103,86 +4974,21 @@
               <a:buNone/>
             </a:pPr>
             <a:r>
-              <a:rPr lang="zh-CN" altLang="en-US" sz="5400" b="1" dirty="0">
-                <a:solidFill>
-                  <a:srgbClr val="002060"/>
-                </a:solidFill>
-                <a:ea typeface="Microsoft JhengHei" panose="020B0604030504040204" pitchFamily="34" charset="-120"/>
+              <a:rPr lang="zh-CN" altLang="en-US" sz="6400" b="1" dirty="0">
+                <a:solidFill>
+                  <a:srgbClr val="000066"/>
+                </a:solidFill>
+                <a:latin typeface="Microsoft JhengHei" pitchFamily="34" charset="-120"/>
+                <a:ea typeface="Microsoft JhengHei" pitchFamily="34" charset="-120"/>
               </a:rPr>
-              <a:t>非</a:t>
-            </a:r>
-            <a:r>
-              <a:rPr lang="zh-CN" altLang="en-US" sz="5400" b="1" dirty="0" smtClean="0">
-                <a:solidFill>
-                  <a:srgbClr val="002060"/>
-                </a:solidFill>
-                <a:ea typeface="Microsoft JhengHei" panose="020B0604030504040204" pitchFamily="34" charset="-120"/>
-              </a:rPr>
-              <a:t>我惟主我求</a:t>
-            </a:r>
-            <a:endParaRPr lang="en-US" altLang="zh-CN" sz="5400" b="1" dirty="0" smtClean="0">
+              <a:t>非我惟主我求</a:t>
+            </a:r>
+            <a:endParaRPr lang="en-US" altLang="zh-CN" sz="6400" b="1" dirty="0">
               <a:solidFill>
-                <a:srgbClr val="002060"/>
+                <a:srgbClr val="000066"/>
               </a:solidFill>
-              <a:ea typeface="Microsoft JhengHei" panose="020B0604030504040204" pitchFamily="34" charset="-120"/>
-            </a:endParaRPr>
-          </a:p>
-          <a:p>
-            <a:pPr marL="0" indent="0" algn="ctr">
-              <a:buNone/>
-            </a:pPr>
-            <a:r>
-              <a:rPr lang="zh-CN" altLang="en-US" sz="5400" b="1" dirty="0">
-                <a:solidFill>
-                  <a:srgbClr val="002060"/>
-                </a:solidFill>
-                <a:ea typeface="Microsoft JhengHei" panose="020B0604030504040204" pitchFamily="34" charset="-120"/>
-              </a:rPr>
-              <a:t>今後活</a:t>
-            </a:r>
-            <a:r>
-              <a:rPr lang="zh-CN" altLang="en-US" sz="5400" b="1" dirty="0" smtClean="0">
-                <a:solidFill>
-                  <a:srgbClr val="002060"/>
-                </a:solidFill>
-                <a:ea typeface="Microsoft JhengHei" panose="020B0604030504040204" pitchFamily="34" charset="-120"/>
-              </a:rPr>
-              <a:t>着不再是我</a:t>
-            </a:r>
-            <a:endParaRPr lang="en-US" altLang="zh-CN" sz="5400" b="1" dirty="0" smtClean="0">
-              <a:solidFill>
-                <a:srgbClr val="002060"/>
-              </a:solidFill>
-              <a:ea typeface="Microsoft JhengHei" panose="020B0604030504040204" pitchFamily="34" charset="-120"/>
-            </a:endParaRPr>
-          </a:p>
-          <a:p>
-            <a:pPr marL="0" indent="0" algn="ctr">
-              <a:buNone/>
-            </a:pPr>
-            <a:r>
-              <a:rPr lang="zh-CN" altLang="en-US" sz="5400" b="1" dirty="0" smtClean="0">
-                <a:solidFill>
-                  <a:srgbClr val="002060"/>
-                </a:solidFill>
-                <a:ea typeface="Microsoft JhengHei" panose="020B0604030504040204" pitchFamily="34" charset="-120"/>
-              </a:rPr>
-              <a:t>乃主為我</a:t>
-            </a:r>
-            <a:r>
-              <a:rPr lang="zh-CN" altLang="en-US" sz="5400" b="1" dirty="0">
-                <a:solidFill>
-                  <a:srgbClr val="002060"/>
-                </a:solidFill>
-                <a:ea typeface="Microsoft JhengHei" panose="020B0604030504040204" pitchFamily="34" charset="-120"/>
-              </a:rPr>
-              <a:t>活着</a:t>
-            </a:r>
-            <a:endParaRPr lang="vi-VN" sz="5400" b="1" dirty="0">
-              <a:solidFill>
-                <a:srgbClr val="002060"/>
-              </a:solidFill>
-              <a:ea typeface="Microsoft JhengHei" panose="020B0604030504040204" pitchFamily="34" charset="-120"/>
+              <a:latin typeface="Microsoft JhengHei" pitchFamily="34" charset="-120"/>
+              <a:ea typeface="Microsoft JhengHei" pitchFamily="34" charset="-120"/>
             </a:endParaRPr>
           </a:p>
         </p:txBody>
@@ -4190,7 +4996,7 @@
     </p:spTree>
     <p:extLst>
       <p:ext uri="{BB962C8B-B14F-4D97-AF65-F5344CB8AC3E}">
-        <p14:creationId xmlns:p14="http://schemas.microsoft.com/office/powerpoint/2010/main" val="1447915523"/>
+        <p14:creationId xmlns:p14="http://schemas.microsoft.com/office/powerpoint/2010/main" val="1764765806"/>
       </p:ext>
     </p:extLst>
   </p:cSld>
@@ -4219,199 +5025,66 @@
       </p:grpSpPr>
       <p:sp>
         <p:nvSpPr>
-          <p:cNvPr id="2" name="Title 1"/>
-          <p:cNvSpPr>
-            <a:spLocks noGrp="1"/>
-          </p:cNvSpPr>
-          <p:nvPr>
-            <p:ph type="title"/>
-          </p:nvPr>
-        </p:nvSpPr>
-        <p:spPr/>
-        <p:txBody>
-          <a:bodyPr>
+          <p:cNvPr id="5" name="內容版面配置區 4"/>
+          <p:cNvSpPr>
+            <a:spLocks noGrp="1"/>
+          </p:cNvSpPr>
+          <p:nvPr>
+            <p:ph idx="1"/>
+          </p:nvPr>
+        </p:nvSpPr>
+        <p:spPr>
+          <a:xfrm>
+            <a:off x="0" y="2084851"/>
+            <a:ext cx="12192000" cy="2404863"/>
+          </a:xfrm>
+        </p:spPr>
+        <p:txBody>
+          <a:bodyPr anchor="ctr">
             <a:normAutofit/>
           </a:bodyPr>
           <a:lstStyle/>
           <a:p>
-            <a:r>
-              <a:rPr lang="zh-CN" altLang="en-US" sz="4800" b="1" dirty="0" smtClean="0">
-                <a:solidFill>
-                  <a:srgbClr val="002060"/>
-                </a:solidFill>
-                <a:latin typeface="Microsoft JhengHei" panose="020B0604030504040204" pitchFamily="34" charset="-120"/>
-                <a:ea typeface="Microsoft JhengHei" panose="020B0604030504040204" pitchFamily="34" charset="-120"/>
+            <a:pPr marL="0" indent="0" algn="ctr">
+              <a:buNone/>
+            </a:pPr>
+            <a:r>
+              <a:rPr lang="zh-CN" altLang="en-US" sz="6400" b="1" dirty="0">
+                <a:solidFill>
+                  <a:srgbClr val="000066"/>
+                </a:solidFill>
+                <a:latin typeface="Microsoft JhengHei" pitchFamily="34" charset="-120"/>
+                <a:ea typeface="Microsoft JhengHei" pitchFamily="34" charset="-120"/>
               </a:rPr>
-              <a:t>非我惟主</a:t>
-            </a:r>
-            <a:endParaRPr lang="vi-VN" sz="4800" b="1" dirty="0">
+              <a:t>今後活着不再是我</a:t>
+            </a:r>
+            <a:endParaRPr lang="en-US" altLang="zh-CN" sz="6400" b="1" dirty="0">
               <a:solidFill>
-                <a:srgbClr val="002060"/>
+                <a:srgbClr val="000066"/>
               </a:solidFill>
-              <a:ea typeface="Microsoft JhengHei" panose="020B0604030504040204" pitchFamily="34" charset="-120"/>
+              <a:latin typeface="Microsoft JhengHei" pitchFamily="34" charset="-120"/>
+              <a:ea typeface="Microsoft JhengHei" pitchFamily="34" charset="-120"/>
             </a:endParaRPr>
           </a:p>
-        </p:txBody>
-      </p:sp>
-      <p:sp>
-        <p:nvSpPr>
-          <p:cNvPr id="3" name="Content Placeholder 2"/>
-          <p:cNvSpPr>
-            <a:spLocks noGrp="1"/>
-          </p:cNvSpPr>
-          <p:nvPr>
-            <p:ph idx="1"/>
-          </p:nvPr>
-        </p:nvSpPr>
-        <p:spPr/>
-        <p:txBody>
-          <a:bodyPr>
-            <a:normAutofit/>
-          </a:bodyPr>
-          <a:lstStyle/>
           <a:p>
             <a:pPr marL="0" indent="0" algn="ctr">
               <a:buNone/>
             </a:pPr>
             <a:r>
-              <a:rPr lang="zh-CN" altLang="en-US" sz="5400" b="1" dirty="0" smtClean="0">
-                <a:solidFill>
-                  <a:srgbClr val="002060"/>
-                </a:solidFill>
-                <a:ea typeface="Microsoft JhengHei" panose="020B0604030504040204" pitchFamily="34" charset="-120"/>
+              <a:rPr lang="zh-CN" altLang="en-US" sz="6400" b="1" dirty="0">
+                <a:solidFill>
+                  <a:srgbClr val="000066"/>
+                </a:solidFill>
+                <a:latin typeface="Microsoft JhengHei" pitchFamily="34" charset="-120"/>
+                <a:ea typeface="Microsoft JhengHei" pitchFamily="34" charset="-120"/>
               </a:rPr>
-              <a:t>主惟有主  今居我心裏為王</a:t>
-            </a:r>
-            <a:endParaRPr lang="en-US" altLang="zh-CN" sz="5400" b="1" dirty="0" smtClean="0">
+              <a:t>乃主為我活着</a:t>
+            </a:r>
+            <a:endParaRPr lang="vi-VN" sz="6400" b="1" dirty="0">
               <a:solidFill>
-                <a:srgbClr val="002060"/>
+                <a:srgbClr val="000066"/>
               </a:solidFill>
-              <a:ea typeface="Microsoft JhengHei" panose="020B0604030504040204" pitchFamily="34" charset="-120"/>
-            </a:endParaRPr>
-          </a:p>
-          <a:p>
-            <a:pPr marL="0" indent="0" algn="ctr">
-              <a:buNone/>
-            </a:pPr>
-            <a:r>
-              <a:rPr lang="zh-CN" altLang="en-US" sz="5400" b="1" dirty="0">
-                <a:solidFill>
-                  <a:srgbClr val="002060"/>
-                </a:solidFill>
-                <a:ea typeface="Microsoft JhengHei" panose="020B0604030504040204" pitchFamily="34" charset="-120"/>
-              </a:rPr>
-              <a:t>主惟有</a:t>
-            </a:r>
-            <a:r>
-              <a:rPr lang="zh-CN" altLang="en-US" sz="5400" b="1" dirty="0" smtClean="0">
-                <a:solidFill>
-                  <a:srgbClr val="002060"/>
-                </a:solidFill>
-                <a:ea typeface="Microsoft JhengHei" panose="020B0604030504040204" pitchFamily="34" charset="-120"/>
-              </a:rPr>
-              <a:t>主  全無急忙聲響</a:t>
-            </a:r>
-            <a:endParaRPr lang="en-US" altLang="zh-CN" sz="5400" b="1" dirty="0" smtClean="0">
-              <a:solidFill>
-                <a:srgbClr val="002060"/>
-              </a:solidFill>
-              <a:ea typeface="Microsoft JhengHei" panose="020B0604030504040204" pitchFamily="34" charset="-120"/>
-            </a:endParaRPr>
-          </a:p>
-          <a:p>
-            <a:pPr marL="0" indent="0" algn="ctr">
-              <a:buNone/>
-            </a:pPr>
-            <a:r>
-              <a:rPr lang="zh-CN" altLang="en-US" sz="5400" b="1" dirty="0">
-                <a:solidFill>
-                  <a:srgbClr val="002060"/>
-                </a:solidFill>
-                <a:ea typeface="Microsoft JhengHei" panose="020B0604030504040204" pitchFamily="34" charset="-120"/>
-              </a:rPr>
-              <a:t>主惟有主  全無高傲的氣</a:t>
-            </a:r>
-            <a:r>
-              <a:rPr lang="zh-CN" altLang="en-US" sz="5400" b="1" dirty="0" smtClean="0">
-                <a:solidFill>
-                  <a:srgbClr val="002060"/>
-                </a:solidFill>
-                <a:ea typeface="Microsoft JhengHei" panose="020B0604030504040204" pitchFamily="34" charset="-120"/>
-              </a:rPr>
-              <a:t>槪</a:t>
-            </a:r>
-            <a:endParaRPr lang="en-US" altLang="zh-CN" sz="5400" b="1" dirty="0" smtClean="0">
-              <a:solidFill>
-                <a:srgbClr val="002060"/>
-              </a:solidFill>
-              <a:ea typeface="Microsoft JhengHei" panose="020B0604030504040204" pitchFamily="34" charset="-120"/>
-            </a:endParaRPr>
-          </a:p>
-          <a:p>
-            <a:pPr marL="0" indent="0" algn="ctr">
-              <a:buNone/>
-            </a:pPr>
-            <a:r>
-              <a:rPr lang="zh-CN" altLang="en-US" sz="5400" b="1" dirty="0">
-                <a:solidFill>
-                  <a:srgbClr val="002060"/>
-                </a:solidFill>
-                <a:ea typeface="Microsoft JhengHei" panose="020B0604030504040204" pitchFamily="34" charset="-120"/>
-              </a:rPr>
-              <a:t>主惟有</a:t>
-            </a:r>
-            <a:r>
-              <a:rPr lang="zh-CN" altLang="en-US" sz="5400" b="1" dirty="0" smtClean="0">
-                <a:solidFill>
-                  <a:srgbClr val="002060"/>
-                </a:solidFill>
-                <a:ea typeface="Microsoft JhengHei" panose="020B0604030504040204" pitchFamily="34" charset="-120"/>
-              </a:rPr>
-              <a:t>主  全無自我存在</a:t>
-            </a:r>
-            <a:endParaRPr lang="vi-VN" sz="5400" b="1" dirty="0">
-              <a:solidFill>
-                <a:srgbClr val="002060"/>
-              </a:solidFill>
-              <a:ea typeface="Microsoft JhengHei" panose="020B0604030504040204" pitchFamily="34" charset="-120"/>
-            </a:endParaRPr>
-          </a:p>
-        </p:txBody>
-      </p:sp>
-      <p:sp>
-        <p:nvSpPr>
-          <p:cNvPr id="4" name="TextBox 3"/>
-          <p:cNvSpPr txBox="1"/>
-          <p:nvPr/>
-        </p:nvSpPr>
-        <p:spPr>
-          <a:xfrm>
-            <a:off x="609600" y="1703070"/>
-            <a:ext cx="1074420" cy="923330"/>
-          </a:xfrm>
-          <a:prstGeom prst="rect">
-            <a:avLst/>
-          </a:prstGeom>
-          <a:noFill/>
-        </p:spPr>
-        <p:txBody>
-          <a:bodyPr wrap="square" rtlCol="0">
-            <a:spAutoFit/>
-          </a:bodyPr>
-          <a:lstStyle/>
-          <a:p>
-            <a:r>
-              <a:rPr lang="en-US" sz="5400" b="1" dirty="0" smtClean="0">
-                <a:solidFill>
-                  <a:srgbClr val="002060"/>
-                </a:solidFill>
-              </a:rPr>
-              <a:t>3.</a:t>
-            </a:r>
-            <a:endParaRPr lang="vi-VN" sz="5400" b="1" dirty="0">
-              <a:solidFill>
-                <a:srgbClr val="002060"/>
-              </a:solidFill>
+              <a:ea typeface="Microsoft JhengHei" pitchFamily="34" charset="-120"/>
             </a:endParaRPr>
           </a:p>
         </p:txBody>
@@ -4419,7 +5092,7 @@
     </p:spTree>
     <p:extLst>
       <p:ext uri="{BB962C8B-B14F-4D97-AF65-F5344CB8AC3E}">
-        <p14:creationId xmlns:p14="http://schemas.microsoft.com/office/powerpoint/2010/main" val="2471555650"/>
+        <p14:creationId xmlns:p14="http://schemas.microsoft.com/office/powerpoint/2010/main" val="3489264369"/>
       </p:ext>
     </p:extLst>
   </p:cSld>
@@ -4448,161 +5121,106 @@
       </p:grpSpPr>
       <p:sp>
         <p:nvSpPr>
-          <p:cNvPr id="2" name="Title 1"/>
-          <p:cNvSpPr>
-            <a:spLocks noGrp="1"/>
-          </p:cNvSpPr>
-          <p:nvPr>
-            <p:ph type="title"/>
-          </p:nvPr>
-        </p:nvSpPr>
-        <p:spPr/>
-        <p:txBody>
-          <a:bodyPr>
+          <p:cNvPr id="5" name="內容版面配置區 4"/>
+          <p:cNvSpPr>
+            <a:spLocks noGrp="1"/>
+          </p:cNvSpPr>
+          <p:nvPr>
+            <p:ph idx="1"/>
+          </p:nvPr>
+        </p:nvSpPr>
+        <p:spPr>
+          <a:xfrm>
+            <a:off x="0" y="2084851"/>
+            <a:ext cx="12192000" cy="2404863"/>
+          </a:xfrm>
+        </p:spPr>
+        <p:txBody>
+          <a:bodyPr anchor="ctr">
             <a:normAutofit/>
           </a:bodyPr>
           <a:lstStyle/>
           <a:p>
-            <a:r>
-              <a:rPr lang="zh-CN" altLang="en-US" sz="4800" b="1" dirty="0" smtClean="0">
-                <a:solidFill>
-                  <a:srgbClr val="002060"/>
-                </a:solidFill>
-                <a:latin typeface="Microsoft JhengHei" panose="020B0604030504040204" pitchFamily="34" charset="-120"/>
-                <a:ea typeface="Microsoft JhengHei" panose="020B0604030504040204" pitchFamily="34" charset="-120"/>
+            <a:pPr marL="0" indent="0" algn="ctr">
+              <a:buNone/>
+            </a:pPr>
+            <a:r>
+              <a:rPr lang="zh-CN" altLang="en-US" sz="6400" b="1" dirty="0">
+                <a:solidFill>
+                  <a:srgbClr val="000066"/>
+                </a:solidFill>
+                <a:latin typeface="Microsoft JhengHei" pitchFamily="34" charset="-120"/>
+                <a:ea typeface="Microsoft JhengHei" pitchFamily="34" charset="-120"/>
               </a:rPr>
-              <a:t>非我惟主</a:t>
-            </a:r>
-            <a:endParaRPr lang="vi-VN" sz="4800" b="1" dirty="0">
+              <a:t>非我惟主  憂傷時主施撫慰</a:t>
+            </a:r>
+            <a:endParaRPr lang="en-US" altLang="zh-CN" sz="6400" b="1" dirty="0">
               <a:solidFill>
-                <a:srgbClr val="002060"/>
+                <a:srgbClr val="000066"/>
               </a:solidFill>
-              <a:ea typeface="Microsoft JhengHei" panose="020B0604030504040204" pitchFamily="34" charset="-120"/>
+              <a:latin typeface="Microsoft JhengHei" pitchFamily="34" charset="-120"/>
+              <a:ea typeface="Microsoft JhengHei" pitchFamily="34" charset="-120"/>
             </a:endParaRPr>
           </a:p>
-        </p:txBody>
-      </p:sp>
-      <p:sp>
-        <p:nvSpPr>
-          <p:cNvPr id="3" name="Content Placeholder 2"/>
-          <p:cNvSpPr>
-            <a:spLocks noGrp="1"/>
-          </p:cNvSpPr>
-          <p:nvPr>
-            <p:ph idx="1"/>
-          </p:nvPr>
-        </p:nvSpPr>
-        <p:spPr/>
-        <p:txBody>
-          <a:bodyPr>
-            <a:normAutofit/>
+          <a:p>
+            <a:pPr marL="0" indent="0" algn="ctr">
+              <a:buNone/>
+            </a:pPr>
+            <a:r>
+              <a:rPr lang="zh-CN" altLang="en-US" sz="6400" b="1" dirty="0">
+                <a:solidFill>
+                  <a:srgbClr val="000066"/>
+                </a:solidFill>
+                <a:latin typeface="Microsoft JhengHei" pitchFamily="34" charset="-120"/>
+                <a:ea typeface="Microsoft JhengHei" pitchFamily="34" charset="-120"/>
+              </a:rPr>
+              <a:t>非我惟主  擦去一切眼淚</a:t>
+            </a:r>
+            <a:endParaRPr lang="en-US" altLang="zh-CN" sz="6400" b="1" dirty="0">
+              <a:solidFill>
+                <a:srgbClr val="000066"/>
+              </a:solidFill>
+              <a:latin typeface="Microsoft JhengHei" pitchFamily="34" charset="-120"/>
+              <a:ea typeface="Microsoft JhengHei" pitchFamily="34" charset="-120"/>
+            </a:endParaRPr>
+          </a:p>
+        </p:txBody>
+      </p:sp>
+      <p:sp>
+        <p:nvSpPr>
+          <p:cNvPr id="3" name="TextBox 2"/>
+          <p:cNvSpPr txBox="1"/>
+          <p:nvPr/>
+        </p:nvSpPr>
+        <p:spPr>
+          <a:xfrm>
+            <a:off x="0" y="5061182"/>
+            <a:ext cx="12192000" cy="584775"/>
+          </a:xfrm>
+          <a:prstGeom prst="rect">
+            <a:avLst/>
+          </a:prstGeom>
+          <a:noFill/>
+        </p:spPr>
+        <p:txBody>
+          <a:bodyPr wrap="square" rtlCol="0">
+            <a:spAutoFit/>
           </a:bodyPr>
           <a:lstStyle/>
           <a:p>
-            <a:pPr marL="0" indent="0" algn="ctr">
-              <a:buNone/>
-            </a:pPr>
-            <a:r>
-              <a:rPr lang="zh-CN" altLang="en-US" sz="5400" b="1" dirty="0" smtClean="0">
-                <a:solidFill>
-                  <a:srgbClr val="002060"/>
-                </a:solidFill>
-                <a:ea typeface="Microsoft JhengHei" panose="020B0604030504040204" pitchFamily="34" charset="-120"/>
+            <a:pPr algn="ctr"/>
+            <a:r>
+              <a:rPr lang="en-US" sz="3200" b="1" dirty="0">
+                <a:solidFill>
+                  <a:srgbClr val="000066"/>
+                </a:solidFill>
               </a:rPr>
-              <a:t>啊求主救我脫離自己</a:t>
-            </a:r>
-            <a:endParaRPr lang="en-US" altLang="zh-CN" sz="5400" b="1" dirty="0" smtClean="0">
+              <a:t>( 2 / 5 )</a:t>
+            </a:r>
+            <a:endParaRPr lang="vi-VN" sz="3200" b="1" dirty="0">
               <a:solidFill>
-                <a:srgbClr val="002060"/>
+                <a:srgbClr val="000066"/>
               </a:solidFill>
-              <a:ea typeface="Microsoft JhengHei" panose="020B0604030504040204" pitchFamily="34" charset="-120"/>
-            </a:endParaRPr>
-          </a:p>
-          <a:p>
-            <a:pPr marL="0" indent="0" algn="ctr">
-              <a:buNone/>
-            </a:pPr>
-            <a:r>
-              <a:rPr lang="zh-CN" altLang="en-US" sz="5400" b="1" dirty="0">
-                <a:solidFill>
-                  <a:srgbClr val="002060"/>
-                </a:solidFill>
-                <a:ea typeface="Microsoft JhengHei" panose="020B0604030504040204" pitchFamily="34" charset="-120"/>
-              </a:rPr>
-              <a:t>非</a:t>
-            </a:r>
-            <a:r>
-              <a:rPr lang="zh-CN" altLang="en-US" sz="5400" b="1" dirty="0" smtClean="0">
-                <a:solidFill>
-                  <a:srgbClr val="002060"/>
-                </a:solidFill>
-                <a:ea typeface="Microsoft JhengHei" panose="020B0604030504040204" pitchFamily="34" charset="-120"/>
-              </a:rPr>
-              <a:t>我惟主我求</a:t>
-            </a:r>
-            <a:endParaRPr lang="en-US" altLang="zh-CN" sz="5400" b="1" dirty="0" smtClean="0">
-              <a:solidFill>
-                <a:srgbClr val="002060"/>
-              </a:solidFill>
-              <a:ea typeface="Microsoft JhengHei" panose="020B0604030504040204" pitchFamily="34" charset="-120"/>
-            </a:endParaRPr>
-          </a:p>
-          <a:p>
-            <a:pPr marL="0" indent="0" algn="ctr">
-              <a:buNone/>
-            </a:pPr>
-            <a:r>
-              <a:rPr lang="zh-CN" altLang="en-US" sz="5400" b="1" dirty="0">
-                <a:solidFill>
-                  <a:srgbClr val="002060"/>
-                </a:solidFill>
-                <a:ea typeface="Microsoft JhengHei" panose="020B0604030504040204" pitchFamily="34" charset="-120"/>
-              </a:rPr>
-              <a:t>今後活</a:t>
-            </a:r>
-            <a:r>
-              <a:rPr lang="zh-CN" altLang="en-US" sz="5400" b="1" dirty="0" smtClean="0">
-                <a:solidFill>
-                  <a:srgbClr val="002060"/>
-                </a:solidFill>
-                <a:ea typeface="Microsoft JhengHei" panose="020B0604030504040204" pitchFamily="34" charset="-120"/>
-              </a:rPr>
-              <a:t>着不再是我</a:t>
-            </a:r>
-            <a:endParaRPr lang="en-US" altLang="zh-CN" sz="5400" b="1" dirty="0" smtClean="0">
-              <a:solidFill>
-                <a:srgbClr val="002060"/>
-              </a:solidFill>
-              <a:ea typeface="Microsoft JhengHei" panose="020B0604030504040204" pitchFamily="34" charset="-120"/>
-            </a:endParaRPr>
-          </a:p>
-          <a:p>
-            <a:pPr marL="0" indent="0" algn="ctr">
-              <a:buNone/>
-            </a:pPr>
-            <a:r>
-              <a:rPr lang="zh-CN" altLang="en-US" sz="5400" b="1" dirty="0" smtClean="0">
-                <a:solidFill>
-                  <a:srgbClr val="002060"/>
-                </a:solidFill>
-                <a:ea typeface="Microsoft JhengHei" panose="020B0604030504040204" pitchFamily="34" charset="-120"/>
-              </a:rPr>
-              <a:t>乃主為我</a:t>
-            </a:r>
-            <a:r>
-              <a:rPr lang="zh-CN" altLang="en-US" sz="5400" b="1" dirty="0">
-                <a:solidFill>
-                  <a:srgbClr val="002060"/>
-                </a:solidFill>
-                <a:ea typeface="Microsoft JhengHei" panose="020B0604030504040204" pitchFamily="34" charset="-120"/>
-              </a:rPr>
-              <a:t>活着</a:t>
-            </a:r>
-            <a:endParaRPr lang="vi-VN" sz="5400" b="1" dirty="0">
-              <a:solidFill>
-                <a:srgbClr val="002060"/>
-              </a:solidFill>
-              <a:ea typeface="Microsoft JhengHei" panose="020B0604030504040204" pitchFamily="34" charset="-120"/>
             </a:endParaRPr>
           </a:p>
         </p:txBody>
@@ -4610,7 +5228,7 @@
     </p:spTree>
     <p:extLst>
       <p:ext uri="{BB962C8B-B14F-4D97-AF65-F5344CB8AC3E}">
-        <p14:creationId xmlns:p14="http://schemas.microsoft.com/office/powerpoint/2010/main" val="4118592979"/>
+        <p14:creationId xmlns:p14="http://schemas.microsoft.com/office/powerpoint/2010/main" val="1119444454"/>
       </p:ext>
     </p:extLst>
   </p:cSld>
@@ -4639,202 +5257,80 @@
       </p:grpSpPr>
       <p:sp>
         <p:nvSpPr>
-          <p:cNvPr id="2" name="Title 1"/>
-          <p:cNvSpPr>
-            <a:spLocks noGrp="1"/>
-          </p:cNvSpPr>
-          <p:nvPr>
-            <p:ph type="title"/>
-          </p:nvPr>
-        </p:nvSpPr>
-        <p:spPr/>
-        <p:txBody>
-          <a:bodyPr>
+          <p:cNvPr id="5" name="內容版面配置區 4"/>
+          <p:cNvSpPr>
+            <a:spLocks noGrp="1"/>
+          </p:cNvSpPr>
+          <p:nvPr>
+            <p:ph idx="1"/>
+          </p:nvPr>
+        </p:nvSpPr>
+        <p:spPr>
+          <a:xfrm>
+            <a:off x="0" y="2084851"/>
+            <a:ext cx="12192000" cy="2404863"/>
+          </a:xfrm>
+        </p:spPr>
+        <p:txBody>
+          <a:bodyPr anchor="ctr">
             <a:normAutofit/>
           </a:bodyPr>
           <a:lstStyle/>
           <a:p>
-            <a:r>
-              <a:rPr lang="zh-CN" altLang="en-US" sz="4800" b="1" dirty="0" smtClean="0">
-                <a:solidFill>
-                  <a:srgbClr val="002060"/>
-                </a:solidFill>
-                <a:latin typeface="Microsoft JhengHei" panose="020B0604030504040204" pitchFamily="34" charset="-120"/>
-                <a:ea typeface="Microsoft JhengHei" panose="020B0604030504040204" pitchFamily="34" charset="-120"/>
+            <a:pPr marL="0" indent="0" algn="ctr">
+              <a:buNone/>
+            </a:pPr>
+            <a:r>
+              <a:rPr lang="zh-CN" altLang="en-US" sz="6400" b="1" dirty="0">
+                <a:solidFill>
+                  <a:srgbClr val="000066"/>
+                </a:solidFill>
+                <a:latin typeface="Microsoft JhengHei" pitchFamily="34" charset="-120"/>
+                <a:ea typeface="Microsoft JhengHei" pitchFamily="34" charset="-120"/>
               </a:rPr>
-              <a:t>非我惟主</a:t>
-            </a:r>
-            <a:endParaRPr lang="vi-VN" sz="4800" b="1" dirty="0">
+              <a:t>非我惟主  將苦惱擔子挑起</a:t>
+            </a:r>
+            <a:endParaRPr lang="en-US" altLang="zh-CN" sz="6400" b="1" dirty="0">
               <a:solidFill>
-                <a:srgbClr val="002060"/>
+                <a:srgbClr val="000066"/>
               </a:solidFill>
-              <a:ea typeface="Microsoft JhengHei" panose="020B0604030504040204" pitchFamily="34" charset="-120"/>
+              <a:latin typeface="Microsoft JhengHei" pitchFamily="34" charset="-120"/>
+              <a:ea typeface="Microsoft JhengHei" pitchFamily="34" charset="-120"/>
             </a:endParaRPr>
           </a:p>
-        </p:txBody>
-      </p:sp>
-      <p:sp>
-        <p:nvSpPr>
-          <p:cNvPr id="3" name="Content Placeholder 2"/>
-          <p:cNvSpPr>
-            <a:spLocks noGrp="1"/>
-          </p:cNvSpPr>
-          <p:nvPr>
-            <p:ph idx="1"/>
-          </p:nvPr>
-        </p:nvSpPr>
-        <p:spPr/>
-        <p:txBody>
-          <a:bodyPr>
-            <a:normAutofit/>
-          </a:bodyPr>
-          <a:lstStyle/>
           <a:p>
             <a:pPr marL="0" indent="0" algn="ctr">
               <a:buNone/>
             </a:pPr>
             <a:r>
-              <a:rPr lang="zh-CN" altLang="en-US" sz="5400" b="1" dirty="0">
-                <a:solidFill>
-                  <a:srgbClr val="002060"/>
-                </a:solidFill>
-                <a:ea typeface="Microsoft JhengHei" panose="020B0604030504040204" pitchFamily="34" charset="-120"/>
+              <a:rPr lang="zh-CN" altLang="en-US" sz="6400" b="1" dirty="0">
+                <a:solidFill>
+                  <a:srgbClr val="000066"/>
+                </a:solidFill>
+                <a:latin typeface="Microsoft JhengHei" pitchFamily="34" charset="-120"/>
+                <a:ea typeface="Microsoft JhengHei" pitchFamily="34" charset="-120"/>
               </a:rPr>
-              <a:t>非</a:t>
-            </a:r>
-            <a:r>
-              <a:rPr lang="zh-CN" altLang="en-US" sz="5400" b="1" dirty="0" smtClean="0">
-                <a:solidFill>
-                  <a:srgbClr val="002060"/>
-                </a:solidFill>
-                <a:ea typeface="Microsoft JhengHei" panose="020B0604030504040204" pitchFamily="34" charset="-120"/>
-              </a:rPr>
-              <a:t>我</a:t>
-            </a:r>
-            <a:r>
-              <a:rPr lang="zh-CN" altLang="en-US" sz="5400" b="1" dirty="0">
-                <a:solidFill>
-                  <a:srgbClr val="002060"/>
-                </a:solidFill>
-                <a:ea typeface="Microsoft JhengHei" panose="020B0604030504040204" pitchFamily="34" charset="-120"/>
-              </a:rPr>
-              <a:t>惟</a:t>
-            </a:r>
-            <a:r>
-              <a:rPr lang="zh-CN" altLang="en-US" sz="5400" b="1" dirty="0" smtClean="0">
-                <a:solidFill>
-                  <a:srgbClr val="002060"/>
-                </a:solidFill>
-                <a:ea typeface="Microsoft JhengHei" panose="020B0604030504040204" pitchFamily="34" charset="-120"/>
-              </a:rPr>
-              <a:t>主  供給我一切需用</a:t>
-            </a:r>
-            <a:endParaRPr lang="en-US" altLang="zh-CN" sz="5400" b="1" dirty="0" smtClean="0">
+              <a:t>非我惟主  消除一切畏懼</a:t>
+            </a:r>
+            <a:endParaRPr lang="vi-VN" sz="6400" b="1" dirty="0">
               <a:solidFill>
-                <a:srgbClr val="002060"/>
+                <a:srgbClr val="000066"/>
               </a:solidFill>
-              <a:ea typeface="Microsoft JhengHei" panose="020B0604030504040204" pitchFamily="34" charset="-120"/>
+              <a:ea typeface="Microsoft JhengHei" pitchFamily="34" charset="-120"/>
             </a:endParaRPr>
           </a:p>
-          <a:p>
-            <a:pPr marL="0" indent="0" algn="ctr">
-              <a:buNone/>
-            </a:pPr>
-            <a:r>
-              <a:rPr lang="zh-CN" altLang="en-US" sz="5400" b="1" dirty="0">
-                <a:solidFill>
-                  <a:srgbClr val="002060"/>
-                </a:solidFill>
-                <a:ea typeface="Microsoft JhengHei" panose="020B0604030504040204" pitchFamily="34" charset="-120"/>
-              </a:rPr>
-              <a:t>主惟有</a:t>
-            </a:r>
-            <a:r>
-              <a:rPr lang="zh-CN" altLang="en-US" sz="5400" b="1" dirty="0" smtClean="0">
-                <a:solidFill>
-                  <a:srgbClr val="002060"/>
-                </a:solidFill>
-                <a:ea typeface="Microsoft JhengHei" panose="020B0604030504040204" pitchFamily="34" charset="-120"/>
-              </a:rPr>
-              <a:t>主  康健能力滿豐</a:t>
-            </a:r>
-            <a:endParaRPr lang="en-US" altLang="zh-CN" sz="5400" b="1" dirty="0" smtClean="0">
-              <a:solidFill>
-                <a:srgbClr val="002060"/>
-              </a:solidFill>
-              <a:ea typeface="Microsoft JhengHei" panose="020B0604030504040204" pitchFamily="34" charset="-120"/>
-            </a:endParaRPr>
-          </a:p>
-          <a:p>
-            <a:pPr marL="0" indent="0" algn="ctr">
-              <a:buNone/>
-            </a:pPr>
-            <a:r>
-              <a:rPr lang="zh-CN" altLang="en-US" sz="5400" b="1" dirty="0">
-                <a:solidFill>
-                  <a:srgbClr val="002060"/>
-                </a:solidFill>
-                <a:ea typeface="Microsoft JhengHei" panose="020B0604030504040204" pitchFamily="34" charset="-120"/>
-              </a:rPr>
-              <a:t>主惟有</a:t>
-            </a:r>
-            <a:r>
-              <a:rPr lang="zh-CN" altLang="en-US" sz="5400" b="1" dirty="0" smtClean="0">
-                <a:solidFill>
-                  <a:srgbClr val="002060"/>
-                </a:solidFill>
-                <a:ea typeface="Microsoft JhengHei" panose="020B0604030504040204" pitchFamily="34" charset="-120"/>
-              </a:rPr>
-              <a:t>主  為我靈魂與身體</a:t>
-            </a:r>
-            <a:endParaRPr lang="en-US" altLang="zh-CN" sz="5400" b="1" dirty="0" smtClean="0">
-              <a:solidFill>
-                <a:srgbClr val="002060"/>
-              </a:solidFill>
-              <a:ea typeface="Microsoft JhengHei" panose="020B0604030504040204" pitchFamily="34" charset="-120"/>
-            </a:endParaRPr>
-          </a:p>
-          <a:p>
-            <a:pPr marL="0" indent="0" algn="ctr">
-              <a:buNone/>
-            </a:pPr>
-            <a:r>
-              <a:rPr lang="zh-CN" altLang="en-US" sz="5400" b="1" dirty="0">
-                <a:solidFill>
-                  <a:srgbClr val="002060"/>
-                </a:solidFill>
-                <a:ea typeface="Microsoft JhengHei" panose="020B0604030504040204" pitchFamily="34" charset="-120"/>
-              </a:rPr>
-              <a:t>主惟有</a:t>
-            </a:r>
-            <a:r>
-              <a:rPr lang="zh-CN" altLang="en-US" sz="5400" b="1" dirty="0" smtClean="0">
-                <a:solidFill>
-                  <a:srgbClr val="002060"/>
-                </a:solidFill>
-                <a:ea typeface="Microsoft JhengHei" panose="020B0604030504040204" pitchFamily="34" charset="-120"/>
-              </a:rPr>
-              <a:t>主  今我活著為你</a:t>
-            </a:r>
-            <a:endParaRPr lang="vi-VN" sz="5400" b="1" dirty="0">
-              <a:solidFill>
-                <a:srgbClr val="002060"/>
-              </a:solidFill>
-              <a:ea typeface="Microsoft JhengHei" panose="020B0604030504040204" pitchFamily="34" charset="-120"/>
-            </a:endParaRPr>
-          </a:p>
-        </p:txBody>
-      </p:sp>
-      <p:sp>
-        <p:nvSpPr>
-          <p:cNvPr id="4" name="TextBox 3"/>
+        </p:txBody>
+      </p:sp>
+      <p:sp>
+        <p:nvSpPr>
+          <p:cNvPr id="3" name="TextBox 2"/>
           <p:cNvSpPr txBox="1"/>
           <p:nvPr/>
         </p:nvSpPr>
         <p:spPr>
           <a:xfrm>
-            <a:off x="609600" y="1703070"/>
-            <a:ext cx="1074420" cy="923330"/>
+            <a:off x="0" y="5061182"/>
+            <a:ext cx="12192000" cy="584775"/>
           </a:xfrm>
           <a:prstGeom prst="rect">
             <a:avLst/>
@@ -4847,25 +5343,18 @@
           </a:bodyPr>
           <a:lstStyle/>
           <a:p>
-            <a:r>
-              <a:rPr lang="en-US" sz="5400" b="1" dirty="0">
-                <a:solidFill>
-                  <a:srgbClr val="002060"/>
+            <a:pPr algn="ctr"/>
+            <a:r>
+              <a:rPr lang="en-US" sz="3200" b="1" dirty="0">
+                <a:solidFill>
+                  <a:srgbClr val="000066"/>
                 </a:solidFill>
               </a:rPr>
-              <a:t>4</a:t>
-            </a:r>
-            <a:r>
-              <a:rPr lang="en-US" sz="5400" b="1" dirty="0" smtClean="0">
-                <a:solidFill>
-                  <a:srgbClr val="002060"/>
-                </a:solidFill>
-              </a:rPr>
-              <a:t>.</a:t>
-            </a:r>
-            <a:endParaRPr lang="vi-VN" sz="5400" b="1" dirty="0">
+              <a:t>( 2 / 5 )</a:t>
+            </a:r>
+            <a:endParaRPr lang="vi-VN" sz="3200" b="1" dirty="0">
               <a:solidFill>
-                <a:srgbClr val="002060"/>
+                <a:srgbClr val="000066"/>
               </a:solidFill>
             </a:endParaRPr>
           </a:p>
@@ -4874,7 +5363,7 @@
     </p:spTree>
     <p:extLst>
       <p:ext uri="{BB962C8B-B14F-4D97-AF65-F5344CB8AC3E}">
-        <p14:creationId xmlns:p14="http://schemas.microsoft.com/office/powerpoint/2010/main" val="4241205438"/>
+        <p14:creationId xmlns:p14="http://schemas.microsoft.com/office/powerpoint/2010/main" val="1755181325"/>
       </p:ext>
     </p:extLst>
   </p:cSld>
@@ -4903,74 +5392,45 @@
       </p:grpSpPr>
       <p:sp>
         <p:nvSpPr>
-          <p:cNvPr id="2" name="Title 1"/>
-          <p:cNvSpPr>
-            <a:spLocks noGrp="1"/>
-          </p:cNvSpPr>
-          <p:nvPr>
-            <p:ph type="title"/>
-          </p:nvPr>
-        </p:nvSpPr>
-        <p:spPr/>
-        <p:txBody>
-          <a:bodyPr>
+          <p:cNvPr id="5" name="內容版面配置區 4"/>
+          <p:cNvSpPr>
+            <a:spLocks noGrp="1"/>
+          </p:cNvSpPr>
+          <p:nvPr>
+            <p:ph idx="1"/>
+          </p:nvPr>
+        </p:nvSpPr>
+        <p:spPr>
+          <a:xfrm>
+            <a:off x="0" y="2084851"/>
+            <a:ext cx="12192000" cy="2404863"/>
+          </a:xfrm>
+        </p:spPr>
+        <p:txBody>
+          <a:bodyPr anchor="ctr">
             <a:normAutofit/>
           </a:bodyPr>
           <a:lstStyle/>
           <a:p>
-            <a:r>
-              <a:rPr lang="zh-CN" altLang="en-US" sz="4800" b="1" dirty="0" smtClean="0">
-                <a:solidFill>
-                  <a:srgbClr val="002060"/>
-                </a:solidFill>
-                <a:latin typeface="Microsoft JhengHei" panose="020B0604030504040204" pitchFamily="34" charset="-120"/>
-                <a:ea typeface="Microsoft JhengHei" panose="020B0604030504040204" pitchFamily="34" charset="-120"/>
-              </a:rPr>
-              <a:t>非我惟主</a:t>
-            </a:r>
-            <a:endParaRPr lang="vi-VN" sz="4800" b="1" dirty="0">
-              <a:solidFill>
-                <a:srgbClr val="002060"/>
-              </a:solidFill>
-              <a:ea typeface="Microsoft JhengHei" panose="020B0604030504040204" pitchFamily="34" charset="-120"/>
-            </a:endParaRPr>
-          </a:p>
-        </p:txBody>
-      </p:sp>
-      <p:sp>
-        <p:nvSpPr>
-          <p:cNvPr id="3" name="Content Placeholder 2"/>
-          <p:cNvSpPr>
-            <a:spLocks noGrp="1"/>
-          </p:cNvSpPr>
-          <p:nvPr>
-            <p:ph idx="1"/>
-          </p:nvPr>
-        </p:nvSpPr>
-        <p:spPr/>
-        <p:txBody>
-          <a:bodyPr>
-            <a:normAutofit/>
-          </a:bodyPr>
-          <a:lstStyle/>
-          <a:p>
             <a:pPr marL="0" indent="0" algn="ctr">
               <a:buNone/>
             </a:pPr>
             <a:r>
-              <a:rPr lang="zh-CN" altLang="en-US" sz="5400" b="1" dirty="0" smtClean="0">
-                <a:solidFill>
-                  <a:srgbClr val="002060"/>
-                </a:solidFill>
-                <a:ea typeface="Microsoft JhengHei" panose="020B0604030504040204" pitchFamily="34" charset="-120"/>
+              <a:rPr lang="zh-CN" altLang="en-US" sz="6400" b="1" dirty="0">
+                <a:solidFill>
+                  <a:srgbClr val="000066"/>
+                </a:solidFill>
+                <a:latin typeface="Microsoft JhengHei" pitchFamily="34" charset="-120"/>
+                <a:ea typeface="Microsoft JhengHei" pitchFamily="34" charset="-120"/>
               </a:rPr>
               <a:t>啊求主救我脫離自己</a:t>
             </a:r>
-            <a:endParaRPr lang="en-US" altLang="zh-CN" sz="5400" b="1" dirty="0" smtClean="0">
+            <a:endParaRPr lang="en-US" altLang="zh-CN" sz="6400" b="1" dirty="0">
               <a:solidFill>
-                <a:srgbClr val="002060"/>
+                <a:srgbClr val="000066"/>
               </a:solidFill>
-              <a:ea typeface="Microsoft JhengHei" panose="020B0604030504040204" pitchFamily="34" charset="-120"/>
+              <a:latin typeface="Microsoft JhengHei" pitchFamily="34" charset="-120"/>
+              <a:ea typeface="Microsoft JhengHei" pitchFamily="34" charset="-120"/>
             </a:endParaRPr>
           </a:p>
           <a:p>
@@ -4978,86 +5438,21 @@
               <a:buNone/>
             </a:pPr>
             <a:r>
-              <a:rPr lang="zh-CN" altLang="en-US" sz="5400" b="1" dirty="0">
-                <a:solidFill>
-                  <a:srgbClr val="002060"/>
-                </a:solidFill>
-                <a:ea typeface="Microsoft JhengHei" panose="020B0604030504040204" pitchFamily="34" charset="-120"/>
+              <a:rPr lang="zh-CN" altLang="en-US" sz="6400" b="1" dirty="0">
+                <a:solidFill>
+                  <a:srgbClr val="000066"/>
+                </a:solidFill>
+                <a:latin typeface="Microsoft JhengHei" pitchFamily="34" charset="-120"/>
+                <a:ea typeface="Microsoft JhengHei" pitchFamily="34" charset="-120"/>
               </a:rPr>
-              <a:t>非</a:t>
-            </a:r>
-            <a:r>
-              <a:rPr lang="zh-CN" altLang="en-US" sz="5400" b="1" dirty="0" smtClean="0">
-                <a:solidFill>
-                  <a:srgbClr val="002060"/>
-                </a:solidFill>
-                <a:ea typeface="Microsoft JhengHei" panose="020B0604030504040204" pitchFamily="34" charset="-120"/>
-              </a:rPr>
-              <a:t>我惟主我求</a:t>
-            </a:r>
-            <a:endParaRPr lang="en-US" altLang="zh-CN" sz="5400" b="1" dirty="0" smtClean="0">
+              <a:t>非我惟主我求</a:t>
+            </a:r>
+            <a:endParaRPr lang="en-US" altLang="zh-CN" sz="6400" b="1" dirty="0">
               <a:solidFill>
-                <a:srgbClr val="002060"/>
+                <a:srgbClr val="000066"/>
               </a:solidFill>
-              <a:ea typeface="Microsoft JhengHei" panose="020B0604030504040204" pitchFamily="34" charset="-120"/>
-            </a:endParaRPr>
-          </a:p>
-          <a:p>
-            <a:pPr marL="0" indent="0" algn="ctr">
-              <a:buNone/>
-            </a:pPr>
-            <a:r>
-              <a:rPr lang="zh-CN" altLang="en-US" sz="5400" b="1" dirty="0">
-                <a:solidFill>
-                  <a:srgbClr val="002060"/>
-                </a:solidFill>
-                <a:ea typeface="Microsoft JhengHei" panose="020B0604030504040204" pitchFamily="34" charset="-120"/>
-              </a:rPr>
-              <a:t>今後活</a:t>
-            </a:r>
-            <a:r>
-              <a:rPr lang="zh-CN" altLang="en-US" sz="5400" b="1" dirty="0" smtClean="0">
-                <a:solidFill>
-                  <a:srgbClr val="002060"/>
-                </a:solidFill>
-                <a:ea typeface="Microsoft JhengHei" panose="020B0604030504040204" pitchFamily="34" charset="-120"/>
-              </a:rPr>
-              <a:t>着不再是我</a:t>
-            </a:r>
-            <a:endParaRPr lang="en-US" altLang="zh-CN" sz="5400" b="1" dirty="0" smtClean="0">
-              <a:solidFill>
-                <a:srgbClr val="002060"/>
-              </a:solidFill>
-              <a:ea typeface="Microsoft JhengHei" panose="020B0604030504040204" pitchFamily="34" charset="-120"/>
-            </a:endParaRPr>
-          </a:p>
-          <a:p>
-            <a:pPr marL="0" indent="0" algn="ctr">
-              <a:buNone/>
-            </a:pPr>
-            <a:r>
-              <a:rPr lang="zh-CN" altLang="en-US" sz="5400" b="1" dirty="0" smtClean="0">
-                <a:solidFill>
-                  <a:srgbClr val="002060"/>
-                </a:solidFill>
-                <a:ea typeface="Microsoft JhengHei" panose="020B0604030504040204" pitchFamily="34" charset="-120"/>
-              </a:rPr>
-              <a:t>乃主為我</a:t>
-            </a:r>
-            <a:r>
-              <a:rPr lang="zh-CN" altLang="en-US" sz="5400" b="1" dirty="0">
-                <a:solidFill>
-                  <a:srgbClr val="002060"/>
-                </a:solidFill>
-                <a:ea typeface="Microsoft JhengHei" panose="020B0604030504040204" pitchFamily="34" charset="-120"/>
-              </a:rPr>
-              <a:t>活着</a:t>
-            </a:r>
-            <a:endParaRPr lang="vi-VN" sz="5400" b="1" dirty="0">
-              <a:solidFill>
-                <a:srgbClr val="002060"/>
-              </a:solidFill>
-              <a:ea typeface="Microsoft JhengHei" panose="020B0604030504040204" pitchFamily="34" charset="-120"/>
+              <a:latin typeface="Microsoft JhengHei" pitchFamily="34" charset="-120"/>
+              <a:ea typeface="Microsoft JhengHei" pitchFamily="34" charset="-120"/>
             </a:endParaRPr>
           </a:p>
         </p:txBody>
@@ -5065,7 +5460,7 @@
     </p:spTree>
     <p:extLst>
       <p:ext uri="{BB962C8B-B14F-4D97-AF65-F5344CB8AC3E}">
-        <p14:creationId xmlns:p14="http://schemas.microsoft.com/office/powerpoint/2010/main" val="184464780"/>
+        <p14:creationId xmlns:p14="http://schemas.microsoft.com/office/powerpoint/2010/main" val="2355713107"/>
       </p:ext>
     </p:extLst>
   </p:cSld>
@@ -5094,216 +5489,66 @@
       </p:grpSpPr>
       <p:sp>
         <p:nvSpPr>
-          <p:cNvPr id="2" name="Title 1"/>
-          <p:cNvSpPr>
-            <a:spLocks noGrp="1"/>
-          </p:cNvSpPr>
-          <p:nvPr>
-            <p:ph type="title"/>
-          </p:nvPr>
-        </p:nvSpPr>
-        <p:spPr/>
-        <p:txBody>
-          <a:bodyPr>
+          <p:cNvPr id="5" name="內容版面配置區 4"/>
+          <p:cNvSpPr>
+            <a:spLocks noGrp="1"/>
+          </p:cNvSpPr>
+          <p:nvPr>
+            <p:ph idx="1"/>
+          </p:nvPr>
+        </p:nvSpPr>
+        <p:spPr>
+          <a:xfrm>
+            <a:off x="0" y="2084851"/>
+            <a:ext cx="12192000" cy="2404863"/>
+          </a:xfrm>
+        </p:spPr>
+        <p:txBody>
+          <a:bodyPr anchor="ctr">
             <a:normAutofit/>
           </a:bodyPr>
           <a:lstStyle/>
           <a:p>
-            <a:r>
-              <a:rPr lang="zh-CN" altLang="en-US" sz="4800" b="1" dirty="0" smtClean="0">
-                <a:solidFill>
-                  <a:srgbClr val="002060"/>
-                </a:solidFill>
-                <a:latin typeface="Microsoft JhengHei" panose="020B0604030504040204" pitchFamily="34" charset="-120"/>
-                <a:ea typeface="Microsoft JhengHei" panose="020B0604030504040204" pitchFamily="34" charset="-120"/>
+            <a:pPr marL="0" indent="0" algn="ctr">
+              <a:buNone/>
+            </a:pPr>
+            <a:r>
+              <a:rPr lang="zh-CN" altLang="en-US" sz="6400" b="1" dirty="0">
+                <a:solidFill>
+                  <a:srgbClr val="000066"/>
+                </a:solidFill>
+                <a:latin typeface="Microsoft JhengHei" pitchFamily="34" charset="-120"/>
+                <a:ea typeface="Microsoft JhengHei" pitchFamily="34" charset="-120"/>
               </a:rPr>
-              <a:t>非我惟主</a:t>
-            </a:r>
-            <a:endParaRPr lang="vi-VN" sz="4800" b="1" dirty="0">
+              <a:t>今後活着不再是我</a:t>
+            </a:r>
+            <a:endParaRPr lang="en-US" altLang="zh-CN" sz="6400" b="1" dirty="0">
               <a:solidFill>
-                <a:srgbClr val="002060"/>
+                <a:srgbClr val="000066"/>
               </a:solidFill>
-              <a:ea typeface="Microsoft JhengHei" panose="020B0604030504040204" pitchFamily="34" charset="-120"/>
+              <a:latin typeface="Microsoft JhengHei" pitchFamily="34" charset="-120"/>
+              <a:ea typeface="Microsoft JhengHei" pitchFamily="34" charset="-120"/>
             </a:endParaRPr>
           </a:p>
-        </p:txBody>
-      </p:sp>
-      <p:sp>
-        <p:nvSpPr>
-          <p:cNvPr id="3" name="Content Placeholder 2"/>
-          <p:cNvSpPr>
-            <a:spLocks noGrp="1"/>
-          </p:cNvSpPr>
-          <p:nvPr>
-            <p:ph idx="1"/>
-          </p:nvPr>
-        </p:nvSpPr>
-        <p:spPr/>
-        <p:txBody>
-          <a:bodyPr>
-            <a:normAutofit/>
-          </a:bodyPr>
-          <a:lstStyle/>
           <a:p>
             <a:pPr marL="0" indent="0" algn="ctr">
               <a:buNone/>
             </a:pPr>
             <a:r>
-              <a:rPr lang="zh-CN" altLang="en-US" sz="5400" b="1" dirty="0">
-                <a:solidFill>
-                  <a:srgbClr val="002060"/>
-                </a:solidFill>
-                <a:ea typeface="Microsoft JhengHei" panose="020B0604030504040204" pitchFamily="34" charset="-120"/>
+              <a:rPr lang="zh-CN" altLang="en-US" sz="6400" b="1" dirty="0">
+                <a:solidFill>
+                  <a:srgbClr val="000066"/>
+                </a:solidFill>
+                <a:latin typeface="Microsoft JhengHei" pitchFamily="34" charset="-120"/>
+                <a:ea typeface="Microsoft JhengHei" pitchFamily="34" charset="-120"/>
               </a:rPr>
-              <a:t>主惟有</a:t>
-            </a:r>
-            <a:r>
-              <a:rPr lang="zh-CN" altLang="en-US" sz="5400" b="1" dirty="0" smtClean="0">
-                <a:solidFill>
-                  <a:srgbClr val="002060"/>
-                </a:solidFill>
-                <a:ea typeface="Microsoft JhengHei" panose="020B0604030504040204" pitchFamily="34" charset="-120"/>
-              </a:rPr>
-              <a:t>主  不久充滿我眼睛</a:t>
-            </a:r>
-            <a:endParaRPr lang="en-US" altLang="zh-CN" sz="5400" b="1" dirty="0" smtClean="0">
+              <a:t>乃主為我活着</a:t>
+            </a:r>
+            <a:endParaRPr lang="vi-VN" sz="6400" b="1" dirty="0">
               <a:solidFill>
-                <a:srgbClr val="002060"/>
+                <a:srgbClr val="000066"/>
               </a:solidFill>
-              <a:ea typeface="Microsoft JhengHei" panose="020B0604030504040204" pitchFamily="34" charset="-120"/>
-            </a:endParaRPr>
-          </a:p>
-          <a:p>
-            <a:pPr marL="0" indent="0" algn="ctr">
-              <a:buNone/>
-            </a:pPr>
-            <a:r>
-              <a:rPr lang="zh-CN" altLang="en-US" sz="5400" b="1" dirty="0">
-                <a:solidFill>
-                  <a:srgbClr val="002060"/>
-                </a:solidFill>
-                <a:ea typeface="Microsoft JhengHei" panose="020B0604030504040204" pitchFamily="34" charset="-120"/>
-              </a:rPr>
-              <a:t>主惟有</a:t>
-            </a:r>
-            <a:r>
-              <a:rPr lang="zh-CN" altLang="en-US" sz="5400" b="1" dirty="0" smtClean="0">
-                <a:solidFill>
-                  <a:srgbClr val="002060"/>
-                </a:solidFill>
-                <a:ea typeface="Microsoft JhengHei" panose="020B0604030504040204" pitchFamily="34" charset="-120"/>
-              </a:rPr>
-              <a:t>主  不久就要顯明</a:t>
-            </a:r>
-            <a:endParaRPr lang="en-US" altLang="zh-CN" sz="5400" b="1" dirty="0" smtClean="0">
-              <a:solidFill>
-                <a:srgbClr val="002060"/>
-              </a:solidFill>
-              <a:ea typeface="Microsoft JhengHei" panose="020B0604030504040204" pitchFamily="34" charset="-120"/>
-            </a:endParaRPr>
-          </a:p>
-          <a:p>
-            <a:pPr marL="0" indent="0" algn="ctr">
-              <a:buNone/>
-            </a:pPr>
-            <a:r>
-              <a:rPr lang="zh-CN" altLang="en-US" sz="5400" b="1" dirty="0">
-                <a:solidFill>
-                  <a:srgbClr val="002060"/>
-                </a:solidFill>
-                <a:ea typeface="Microsoft JhengHei" panose="020B0604030504040204" pitchFamily="34" charset="-120"/>
-              </a:rPr>
-              <a:t>主惟有</a:t>
-            </a:r>
-            <a:r>
-              <a:rPr lang="zh-CN" altLang="en-US" sz="5400" b="1" dirty="0" smtClean="0">
-                <a:solidFill>
-                  <a:srgbClr val="002060"/>
-                </a:solidFill>
-                <a:ea typeface="Microsoft JhengHei" panose="020B0604030504040204" pitchFamily="34" charset="-120"/>
-              </a:rPr>
-              <a:t>主  一切所望都成全</a:t>
-            </a:r>
-            <a:endParaRPr lang="en-US" altLang="zh-CN" sz="5400" b="1" dirty="0" smtClean="0">
-              <a:solidFill>
-                <a:srgbClr val="002060"/>
-              </a:solidFill>
-              <a:ea typeface="Microsoft JhengHei" panose="020B0604030504040204" pitchFamily="34" charset="-120"/>
-            </a:endParaRPr>
-          </a:p>
-          <a:p>
-            <a:pPr marL="0" indent="0" algn="ctr">
-              <a:buNone/>
-            </a:pPr>
-            <a:r>
-              <a:rPr lang="zh-CN" altLang="en-US" sz="5400" b="1" dirty="0">
-                <a:solidFill>
-                  <a:srgbClr val="002060"/>
-                </a:solidFill>
-                <a:ea typeface="Microsoft JhengHei" panose="020B0604030504040204" pitchFamily="34" charset="-120"/>
-              </a:rPr>
-              <a:t>主惟有</a:t>
-            </a:r>
-            <a:r>
-              <a:rPr lang="zh-CN" altLang="en-US" sz="5400" b="1" dirty="0" smtClean="0">
-                <a:solidFill>
-                  <a:srgbClr val="002060"/>
-                </a:solidFill>
-                <a:ea typeface="Microsoft JhengHei" panose="020B0604030504040204" pitchFamily="34" charset="-120"/>
-              </a:rPr>
-              <a:t>主  永遠是我一切</a:t>
-            </a:r>
-            <a:endParaRPr lang="vi-VN" sz="5400" b="1" dirty="0">
-              <a:solidFill>
-                <a:srgbClr val="002060"/>
-              </a:solidFill>
-              <a:ea typeface="Microsoft JhengHei" panose="020B0604030504040204" pitchFamily="34" charset="-120"/>
-            </a:endParaRPr>
-          </a:p>
-        </p:txBody>
-      </p:sp>
-      <p:sp>
-        <p:nvSpPr>
-          <p:cNvPr id="4" name="TextBox 3"/>
-          <p:cNvSpPr txBox="1"/>
-          <p:nvPr/>
-        </p:nvSpPr>
-        <p:spPr>
-          <a:xfrm>
-            <a:off x="609600" y="1703070"/>
-            <a:ext cx="1074420" cy="923330"/>
-          </a:xfrm>
-          <a:prstGeom prst="rect">
-            <a:avLst/>
-          </a:prstGeom>
-          <a:noFill/>
-        </p:spPr>
-        <p:txBody>
-          <a:bodyPr wrap="square" rtlCol="0">
-            <a:spAutoFit/>
-          </a:bodyPr>
-          <a:lstStyle/>
-          <a:p>
-            <a:r>
-              <a:rPr lang="en-US" sz="5400" b="1" dirty="0" smtClean="0">
-                <a:solidFill>
-                  <a:srgbClr val="002060"/>
-                </a:solidFill>
-              </a:rPr>
-              <a:t>5</a:t>
-            </a:r>
-            <a:r>
-              <a:rPr lang="en-US" sz="5400" b="1" dirty="0" smtClean="0">
-                <a:solidFill>
-                  <a:srgbClr val="002060"/>
-                </a:solidFill>
-              </a:rPr>
-              <a:t>.</a:t>
-            </a:r>
-            <a:endParaRPr lang="vi-VN" sz="5400" b="1" dirty="0">
-              <a:solidFill>
-                <a:srgbClr val="002060"/>
-              </a:solidFill>
+              <a:ea typeface="Microsoft JhengHei" pitchFamily="34" charset="-120"/>
             </a:endParaRPr>
           </a:p>
         </p:txBody>
@@ -5311,7 +5556,7 @@
     </p:spTree>
     <p:extLst>
       <p:ext uri="{BB962C8B-B14F-4D97-AF65-F5344CB8AC3E}">
-        <p14:creationId xmlns:p14="http://schemas.microsoft.com/office/powerpoint/2010/main" val="891618156"/>
+        <p14:creationId xmlns:p14="http://schemas.microsoft.com/office/powerpoint/2010/main" val="375167515"/>
       </p:ext>
     </p:extLst>
   </p:cSld>
